--- a/Assignment 7.1.pptx
+++ b/Assignment 7.1.pptx
@@ -10,7 +10,6 @@
     <p:sldId id="258" r:id="rId4"/>
     <p:sldId id="259" r:id="rId5"/>
     <p:sldId id="260" r:id="rId6"/>
-    <p:sldId id="261" r:id="rId7"/>
   </p:sldIdLst>
   <p:sldSz cx="9144000" cy="5143500" type="screen16x9"/>
   <p:notesSz cx="6858000" cy="9144000"/>
@@ -3199,42 +3198,7 @@
             </a:pPr>
             <a:r>
               <a:rPr/>
-              <a:t>Quarto</a:t>
-            </a:r>
-          </a:p>
-        </p:txBody>
-      </p:sp>
-      <p:sp>
-        <p:nvSpPr>
-          <p:cNvPr id="3" name="Content Placeholder 2"/>
-          <p:cNvSpPr>
-            <a:spLocks noGrp="1"/>
-          </p:cNvSpPr>
-          <p:nvPr>
-            <p:ph idx="1"/>
-          </p:nvPr>
-        </p:nvSpPr>
-        <p:spPr/>
-        <p:txBody>
-          <a:bodyPr/>
-          <a:lstStyle/>
-          <a:p>
-            <a:pPr lvl="0" indent="0" marL="0">
-              <a:buNone/>
-            </a:pPr>
-            <a:r>
-              <a:rPr/>
-              <a:t>Quarto enables you to weave together content and executable code into a finished presentation. To learn more about Quarto presentations see </a:t>
-            </a:r>
-            <a:r>
-              <a:rPr>
-                <a:hlinkClick r:id="rId2"/>
-              </a:rPr>
-              <a:t>https://quarto.org/docs/presentations/</a:t>
-            </a:r>
-            <a:r>
-              <a:rPr/>
-              <a:t>.</a:t>
+              <a:t>Download the Necessary Packages</a:t>
             </a:r>
           </a:p>
         </p:txBody>
@@ -3301,34 +3265,2566 @@
           <a:bodyPr/>
           <a:lstStyle/>
           <a:p>
-            <a:pPr lvl="0" indent="0" marL="0">
+            <a:pPr lvl="0" indent="0">
               <a:buNone/>
             </a:pPr>
             <a:r>
-              <a:rPr/>
-              <a:t>When you click the </a:t>
-            </a:r>
-            <a:r>
-              <a:rPr b="1"/>
-              <a:t>Render</a:t>
-            </a:r>
-            <a:r>
-              <a:rPr/>
-              <a:t> button a document will be generated that includes:</a:t>
-            </a:r>
-          </a:p>
-          <a:p>
-            <a:pPr lvl="0"/>
-            <a:r>
-              <a:rPr/>
-              <a:t>Content authored with markdown</a:t>
-            </a:r>
-          </a:p>
-          <a:p>
-            <a:pPr lvl="0"/>
-            <a:r>
-              <a:rPr/>
-              <a:t>Output from executable code</a:t>
+              <a:rPr>
+                <a:latin typeface="Courier"/>
+              </a:rPr>
+              <a:t>                                        Country.Name Country.Code
+1                                         Bangladesh          BGD
+2                                         Bangladesh          BGD
+3                                         Bangladesh          BGD
+4                                              China          CHN
+5                                              China          CHN
+6                                              China          CHN
+7                                              Chile          CHL
+8                                              Chile          CHL
+9                                              Chile          CHL
+10                                              Chad          TCD
+11                                              Chad          TCD
+12                                              Chad          TCD
+13                                          Colombia          COL
+14                                          Colombia          COL
+15                                          Colombia          COL
+16                                     Cote d'Ivoire          CIV
+17                                     Cote d'Ivoire          CIV
+18                                     Cote d'Ivoire          CIV
+19                                           Ireland          IRL
+20                                           Ireland          IRL
+21                                           Ireland          IRL
+22                                             India          IND
+23                                             India          IND
+24                                             India          IND
+25                                Iran, Islamic Rep.          IRN
+26                                Iran, Islamic Rep.          IRN
+27                                Iran, Islamic Rep.          IRN
+28                                             Haiti          HTI
+29                                             Haiti          HTI
+30                                             Haiti          HTI
+31                                            Guinea          GIN
+32                                            Guinea          GIN
+33                                            Guinea          GIN
+34                                          Honduras          HND
+35                                          Honduras          HND
+36                                          Honduras          HND
+37                                           Hungary          HUN
+38                                           Hungary          HUN
+39                                           Hungary          HUN
+40                                            Guyana          GUY
+41                                            Guyana          GUY
+42                                            Guyana          GUY
+43                                              Iraq          IRQ
+44                                              Iraq          IRQ
+45                                              Iraq          IRQ
+46                                             Italy          ITA
+47                                             Italy          ITA
+48                                             Italy          ITA
+49                                             Japan          JPN
+50                                             Japan          JPN
+51                                             Japan          JPN
+52                                        Kazakhstan          KAZ
+53                                        Kazakhstan          KAZ
+54                                        Kazakhstan          KAZ
+55                                             Kenya          KEN
+56                                             Kenya          KEN
+57                                             Kenya          KEN
+58                                            Jordan          JOR
+59                                            Jordan          JOR
+60                                            Jordan          JOR
+61                                           Jamaica          JAM
+62                                           Jamaica          JAM
+63                                           Jamaica          JAM
+64                                            Kuwait          KWT
+65                                            Kuwait          KWT
+66                                            Kuwait          KWT
+67                                             Libya          LBY
+68                                             Libya          LBY
+69                                             Libya          LBY
+70                                           Lebanon          LBN
+71                                           Lebanon          LBN
+72                                           Lebanon          LBN
+73                                            Mexico          MEX
+74                                            Mexico          MEX
+75                                            Mexico          MEX
+76                                          Malaysia          MYS
+77                                          Malaysia          MYS
+78                                          Malaysia          MYS
+79                                        Madagascar          MDG
+80                                        Madagascar          MDG
+81                                        Madagascar          MDG
+82                                          Maldives          MDV
+83                                          Maldives          MDV
+84                                          Maldives          MDV
+85                                           Morocco          MAR
+86                                           Morocco          MAR
+87                                           Morocco          MAR
+88                                        Montenegro          MNE
+89                                        Montenegro          MNE
+90                                        Montenegro          MNE
+91                                            Monaco          MCO
+92                                            Monaco          MCO
+93                                            Monaco          MCO
+94                                           Vanuatu          VUT
+95                                           Vanuatu          VUT
+96                                           Vanuatu          VUT
+97                              United Arab Emirates          ARE
+98                              United Arab Emirates          ARE
+99                              United Arab Emirates          ARE
+100                                           Uganda          UGA
+101                                           Uganda          UGA
+102                                           Uganda          UGA
+103                                    United States          USA
+104                                    United States          USA
+105                                    United States          USA
+106                                         Zimbabwe          ZWE
+107                                         Zimbabwe          ZWE
+108                                         Zimbabwe          ZWE
+109 Data from database: World Development Indicators         &lt;NA&gt;
+110                         Last Updated: 02/24/2026         &lt;NA&gt;
+                                                                                           Series.Name
+1                                                            Gross capital formation (annual % growth)
+2                                                             Fertility rate, total (births per woman)
+3   Educational attainment, at least completed post-secondary, population 25+, female (%) (cumulative)
+4                                                            Gross capital formation (annual % growth)
+5                                                             Fertility rate, total (births per woman)
+6   Educational attainment, at least completed post-secondary, population 25+, female (%) (cumulative)
+7                                                            Gross capital formation (annual % growth)
+8                                                             Fertility rate, total (births per woman)
+9   Educational attainment, at least completed post-secondary, population 25+, female (%) (cumulative)
+10                                                           Gross capital formation (annual % growth)
+11                                                            Fertility rate, total (births per woman)
+12  Educational attainment, at least completed post-secondary, population 25+, female (%) (cumulative)
+13                                                           Gross capital formation (annual % growth)
+14                                                            Fertility rate, total (births per woman)
+15  Educational attainment, at least completed post-secondary, population 25+, female (%) (cumulative)
+16                                                           Gross capital formation (annual % growth)
+17                                                            Fertility rate, total (births per woman)
+18  Educational attainment, at least completed post-secondary, population 25+, female (%) (cumulative)
+19                                                           Gross capital formation (annual % growth)
+20                                                            Fertility rate, total (births per woman)
+21  Educational attainment, at least completed post-secondary, population 25+, female (%) (cumulative)
+22                                                           Gross capital formation (annual % growth)
+23                                                            Fertility rate, total (births per woman)
+24  Educational attainment, at least completed post-secondary, population 25+, female (%) (cumulative)
+25                                                           Gross capital formation (annual % growth)
+26                                                            Fertility rate, total (births per woman)
+27  Educational attainment, at least completed post-secondary, population 25+, female (%) (cumulative)
+28                                                           Gross capital formation (annual % growth)
+29                                                            Fertility rate, total (births per woman)
+30  Educational attainment, at least completed post-secondary, population 25+, female (%) (cumulative)
+31                                                           Gross capital formation (annual % growth)
+32                                                            Fertility rate, total (births per woman)
+33  Educational attainment, at least completed post-secondary, population 25+, female (%) (cumulative)
+34                                                           Gross capital formation (annual % growth)
+35                                                            Fertility rate, total (births per woman)
+36  Educational attainment, at least completed post-secondary, population 25+, female (%) (cumulative)
+37                                                           Gross capital formation (annual % growth)
+38                                                            Fertility rate, total (births per woman)
+39  Educational attainment, at least completed post-secondary, population 25+, female (%) (cumulative)
+40                                                           Gross capital formation (annual % growth)
+41                                                            Fertility rate, total (births per woman)
+42  Educational attainment, at least completed post-secondary, population 25+, female (%) (cumulative)
+43                                                           Gross capital formation (annual % growth)
+44                                                            Fertility rate, total (births per woman)
+45  Educational attainment, at least completed post-secondary, population 25+, female (%) (cumulative)
+46                                                           Gross capital formation (annual % growth)
+47                                                            Fertility rate, total (births per woman)
+48  Educational attainment, at least completed post-secondary, population 25+, female (%) (cumulative)
+49                                                           Gross capital formation (annual % growth)
+50                                                            Fertility rate, total (births per woman)
+51  Educational attainment, at least completed post-secondary, population 25+, female (%) (cumulative)
+52                                                           Gross capital formation (annual % growth)
+53                                                            Fertility rate, total (births per woman)
+54  Educational attainment, at least completed post-secondary, population 25+, female (%) (cumulative)
+55                                                           Gross capital formation (annual % growth)
+56                                                            Fertility rate, total (births per woman)
+57  Educational attainment, at least completed post-secondary, population 25+, female (%) (cumulative)
+58                                                           Gross capital formation (annual % growth)
+59                                                            Fertility rate, total (births per woman)
+60  Educational attainment, at least completed post-secondary, population 25+, female (%) (cumulative)
+61                                                           Gross capital formation (annual % growth)
+62                                                            Fertility rate, total (births per woman)
+63  Educational attainment, at least completed post-secondary, population 25+, female (%) (cumulative)
+64                                                           Gross capital formation (annual % growth)
+65                                                            Fertility rate, total (births per woman)
+66  Educational attainment, at least completed post-secondary, population 25+, female (%) (cumulative)
+67                                                           Gross capital formation (annual % growth)
+68                                                            Fertility rate, total (births per woman)
+69  Educational attainment, at least completed post-secondary, population 25+, female (%) (cumulative)
+70                                                           Gross capital formation (annual % growth)
+71                                                            Fertility rate, total (births per woman)
+72  Educational attainment, at least completed post-secondary, population 25+, female (%) (cumulative)
+73                                                           Gross capital formation (annual % growth)
+74                                                            Fertility rate, total (births per woman)
+75  Educational attainment, at least completed post-secondary, population 25+, female (%) (cumulative)
+76                                                           Gross capital formation (annual % growth)
+77                                                            Fertility rate, total (births per woman)
+78  Educational attainment, at least completed post-secondary, population 25+, female (%) (cumulative)
+79                                                           Gross capital formation (annual % growth)
+80                                                            Fertility rate, total (births per woman)
+81  Educational attainment, at least completed post-secondary, population 25+, female (%) (cumulative)
+82                                                           Gross capital formation (annual % growth)
+83                                                            Fertility rate, total (births per woman)
+84  Educational attainment, at least completed post-secondary, population 25+, female (%) (cumulative)
+85                                                           Gross capital formation (annual % growth)
+86                                                            Fertility rate, total (births per woman)
+87  Educational attainment, at least completed post-secondary, population 25+, female (%) (cumulative)
+88                                                           Gross capital formation (annual % growth)
+89                                                            Fertility rate, total (births per woman)
+90  Educational attainment, at least completed post-secondary, population 25+, female (%) (cumulative)
+91                                                           Gross capital formation (annual % growth)
+92                                                            Fertility rate, total (births per woman)
+93  Educational attainment, at least completed post-secondary, population 25+, female (%) (cumulative)
+94                                                           Gross capital formation (annual % growth)
+95                                                            Fertility rate, total (births per woman)
+96  Educational attainment, at least completed post-secondary, population 25+, female (%) (cumulative)
+97                                                           Gross capital formation (annual % growth)
+98                                                            Fertility rate, total (births per woman)
+99  Educational attainment, at least completed post-secondary, population 25+, female (%) (cumulative)
+100                                                          Gross capital formation (annual % growth)
+101                                                           Fertility rate, total (births per woman)
+102 Educational attainment, at least completed post-secondary, population 25+, female (%) (cumulative)
+103                                                          Gross capital formation (annual % growth)
+104                                                           Fertility rate, total (births per woman)
+105 Educational attainment, at least completed post-secondary, population 25+, female (%) (cumulative)
+106                                                          Gross capital formation (annual % growth)
+107                                                           Fertility rate, total (births per woman)
+108 Educational attainment, at least completed post-secondary, population 25+, female (%) (cumulative)
+109                                                                                               &lt;NA&gt;
+110                                                                                               &lt;NA&gt;
+             Series.Code               1960                1961
+1      NE.GDI.TOTL.KD.ZG                 ..  18.764939980773249
+2         SP.DYN.TFRT.IN              6.742                6.78
+3   SE.SEC.CUAT.PO.FE.ZS                 ..                  ..
+4      NE.GDI.TOTL.KD.ZG                 ..                  ..
+5         SP.DYN.TFRT.IN 4.4509999999999996               3.863
+6   SE.SEC.CUAT.PO.FE.ZS                 ..                  ..
+7      NE.GDI.TOTL.KD.ZG                 ..  1.2858581450955171
+8         SP.DYN.TFRT.IN 4.6970000000000001  4.6550000000000002
+9   SE.SEC.CUAT.PO.FE.ZS                 ..                  ..
+10     NE.GDI.TOTL.KD.ZG                 ..                  ..
+11        SP.DYN.TFRT.IN               6.25  6.2679999999999998
+12  SE.SEC.CUAT.PO.FE.ZS                 ..                  ..
+13     NE.GDI.TOTL.KD.ZG                 ..   10.08521199851215
+14        SP.DYN.TFRT.IN 6.7350000000000003  6.7119999999999997
+15  SE.SEC.CUAT.PO.FE.ZS                 ..                  ..
+16     NE.GDI.TOTL.KD.ZG                 ..                  ..
+17        SP.DYN.TFRT.IN 7.6909999999999998                7.72
+18  SE.SEC.CUAT.PO.FE.ZS                 ..                  ..
+19     NE.GDI.TOTL.KD.ZG                 ..                  ..
+20        SP.DYN.TFRT.IN               3.78                3.78
+21  SE.SEC.CUAT.PO.FE.ZS                 ..                  ..
+22     NE.GDI.TOTL.KD.ZG                 .. -1.0432659014677483
+23        SP.DYN.TFRT.IN 5.9210000000000003  5.9370000000000003
+24  SE.SEC.CUAT.PO.FE.ZS                 ..                  ..
+25     NE.GDI.TOTL.KD.ZG                 ..  6.5871575882885196
+26        SP.DYN.TFRT.IN 7.5190000000000001  7.4589999999999996
+27  SE.SEC.CUAT.PO.FE.ZS                 ..                  ..
+28     NE.GDI.TOTL.KD.ZG                 ..                  ..
+29        SP.DYN.TFRT.IN 6.1779999999999999  6.1790000000000003
+30  SE.SEC.CUAT.PO.FE.ZS                 ..                  ..
+31     NE.GDI.TOTL.KD.ZG                 ..                  ..
+32        SP.DYN.TFRT.IN 6.1120000000000001  6.1260000000000003
+33  SE.SEC.CUAT.PO.FE.ZS                 ..                  ..
+34     NE.GDI.TOTL.KD.ZG                 .. -2.3106996984528223
+35        SP.DYN.TFRT.IN 7.4580000000000002  7.4480000000000004
+36  SE.SEC.CUAT.PO.FE.ZS                 ..                  ..
+37     NE.GDI.TOTL.KD.ZG                 ..                  ..
+38        SP.DYN.TFRT.IN               2.02                1.94
+39  SE.SEC.CUAT.PO.FE.ZS                 ..                  ..
+40     NE.GDI.TOTL.KD.ZG                 ..                  ..
+41        SP.DYN.TFRT.IN 6.3310000000000004  6.3390000000000004
+42  SE.SEC.CUAT.PO.FE.ZS                 ..                  ..
+43     NE.GDI.TOTL.KD.ZG                 ..                  ..
+44        SP.DYN.TFRT.IN                5.3                 5.8
+45  SE.SEC.CUAT.PO.FE.ZS                 ..                  ..
+46     NE.GDI.TOTL.KD.ZG                 ..                  ..
+47        SP.DYN.TFRT.IN                2.4                2.44
+48  SE.SEC.CUAT.PO.FE.ZS                 ..                  ..
+49     NE.GDI.TOTL.KD.ZG                 ..                  ..
+50        SP.DYN.TFRT.IN                  2                1.96
+51  SE.SEC.CUAT.PO.FE.ZS                 ..                  ..
+52     NE.GDI.TOTL.KD.ZG                 ..                  ..
+53        SP.DYN.TFRT.IN 4.4950000000000001  4.4240000000000004
+54  SE.SEC.CUAT.PO.FE.ZS                 ..                  ..
+55     NE.GDI.TOTL.KD.ZG                 .. -35.187909439417439
+56        SP.DYN.TFRT.IN 7.6509999999999998  7.7149999999999999
+57  SE.SEC.CUAT.PO.FE.ZS                 ..                  ..
+58     NE.GDI.TOTL.KD.ZG                 ..                  ..
+59        SP.DYN.TFRT.IN 7.5990000000000002  7.6989999999999998
+60  SE.SEC.CUAT.PO.FE.ZS                 ..                  ..
+61     NE.GDI.TOTL.KD.ZG                 ..                  ..
+62        SP.DYN.TFRT.IN 5.5380000000000003  5.5970000000000004
+63  SE.SEC.CUAT.PO.FE.ZS                 ..                  ..
+64     NE.GDI.TOTL.KD.ZG                 ..                  ..
+65        SP.DYN.TFRT.IN 7.2229999999999999  7.2480000000000002
+66  SE.SEC.CUAT.PO.FE.ZS                 ..                  ..
+67     NE.GDI.TOTL.KD.ZG                 ..                  ..
+68        SP.DYN.TFRT.IN 7.5090000000000003               7.556
+69  SE.SEC.CUAT.PO.FE.ZS                 ..                  ..
+70     NE.GDI.TOTL.KD.ZG                 ..                  ..
+71        SP.DYN.TFRT.IN 5.8769999999999998               5.891
+72  SE.SEC.CUAT.PO.FE.ZS                 ..                  ..
+73     NE.GDI.TOTL.KD.ZG                 ..  3.5415330932758309
+74        SP.DYN.TFRT.IN 6.7629999999999999  6.7770000000000001
+75  SE.SEC.CUAT.PO.FE.ZS                 ..                  ..
+76     NE.GDI.TOTL.KD.ZG                 .. -2.7327545914852749
+77        SP.DYN.TFRT.IN 6.4119999999999999               6.367
+78  SE.SEC.CUAT.PO.FE.ZS                 ..                  ..
+79     NE.GDI.TOTL.KD.ZG                 .. -13.332961088488688
+80        SP.DYN.TFRT.IN              7.343  7.2990000000000004
+81  SE.SEC.CUAT.PO.FE.ZS                 ..                  ..
+82     NE.GDI.TOTL.KD.ZG                 ..                  ..
+83        SP.DYN.TFRT.IN 6.7130000000000001  6.7919999999999998
+84  SE.SEC.CUAT.PO.FE.ZS                 ..                  ..
+85     NE.GDI.TOTL.KD.ZG                 ..                  ..
+86        SP.DYN.TFRT.IN 6.8869999999999996  6.9690000000000003
+87  SE.SEC.CUAT.PO.FE.ZS                 ..                  ..
+88     NE.GDI.TOTL.KD.ZG                 ..                  ..
+89        SP.DYN.TFRT.IN              3.532  3.4870000000000001
+90  SE.SEC.CUAT.PO.FE.ZS                 ..                  ..
+91     NE.GDI.TOTL.KD.ZG                 ..                  ..
+92        SP.DYN.TFRT.IN 2.8119999999999998  2.7829999999999999
+93  SE.SEC.CUAT.PO.FE.ZS                 ..                  ..
+94     NE.GDI.TOTL.KD.ZG                 ..                  ..
+95        SP.DYN.TFRT.IN 6.7839999999999998  6.7290000000000001
+96  SE.SEC.CUAT.PO.FE.ZS                 ..                  ..
+97     NE.GDI.TOTL.KD.ZG                 ..                  ..
+98        SP.DYN.TFRT.IN 6.4989999999999997  6.4939999999999998
+99  SE.SEC.CUAT.PO.FE.ZS                 ..                  ..
+100    NE.GDI.TOTL.KD.ZG                 ..                  ..
+101       SP.DYN.TFRT.IN 6.9050000000000002  6.9269999999999996
+102 SE.SEC.CUAT.PO.FE.ZS                 ..                  ..
+103    NE.GDI.TOTL.KD.ZG                 ..                  ..
+104       SP.DYN.TFRT.IN 3.6539999999999999                3.62
+105 SE.SEC.CUAT.PO.FE.ZS                 ..                  ..
+106    NE.GDI.TOTL.KD.ZG                 ..                  ..
+107       SP.DYN.TFRT.IN 7.1950000000000003  7.2119999999999997
+108 SE.SEC.CUAT.PO.FE.ZS                 ..                  ..
+109                 &lt;NA&gt;               &lt;NA&gt;                &lt;NA&gt;
+110                 &lt;NA&gt;               &lt;NA&gt;                &lt;NA&gt;
+                    1962                1963                1964
+1     61.888636233564434 -23.493379044439266  25.297933030095422
+2                  6.806               6.798  6.7850000000000001
+3                     ..                  ..                  ..
+4                     ..                  ..                  ..
+5                  6.085  7.5129999999999999  6.6719999999999997
+6                     ..                  ..                  ..
+7     12.269610214927425  14.761580381798339 -5.6983439183877209
+8     4.6020000000000003  4.5359999999999996  4.4569999999999999
+9                     ..                  ..                  ..
+10                    ..                  ..                  ..
+11    6.2850000000000001  6.3010000000000002  6.3179999999999996
+12                    ..                  ..                  ..
+13   -6.6759707911972015 -3.4266317799240653  13.199503063837085
+14    6.6630000000000003  6.5839999999999996  6.4749999999999996
+15                    ..                  ..                  ..
+16                    ..                  ..                  ..
+17                  7.75  7.7809999999999997  7.8109999999999999
+18                    ..                  ..                  ..
+19                    ..                  ..                  ..
+20                  3.92                4.01                4.07
+21                    ..                  ..                  ..
+22     14.19693355227119  7.4152395477375705  10.403832948015477
+23    5.9530000000000003  5.9690000000000003  5.9790000000000001
+24                    ..                  ..                  ..
+25  -0.35001215910553185  6.6570345185916722  18.551709134044913
+26    7.4009999999999998  7.3170000000000002  7.2370000000000001
+27                    ..                  ..                  ..
+28                    ..                  ..                  ..
+29    6.1749999999999998               6.173  6.1639999999999997
+30                    ..                  ..                  ..
+31                    ..                  ..                  ..
+32                  6.14  6.1529999999999996  6.1660000000000004
+33                    ..                  ..                  ..
+34   -14.820004716866293 -59.868325776077597 -11.098484817664044
+35    7.4429999999999996  7.4409999999999998  7.4429999999999996
+36                    ..                  ..                  ..
+37                    ..                  ..                  ..
+38                  1.79                1.82                1.82
+39                    ..                  ..                  ..
+40                    ..                  ..                  ..
+41    6.3330000000000002  6.3070000000000004  6.2320000000000002
+42                    ..                  ..                  ..
+43                    ..                  ..                  ..
+44    6.9909999999999997  7.0049999999999999                7.01
+45                    ..                  ..                  ..
+46                    ..                  ..                  ..
+47                  2.46  2.5099999999999998                2.66
+48                    ..                  ..                  ..
+49                    ..                  ..                  ..
+50                  1.98                   2  2.0499999999999998
+51                    ..                  ..                  ..
+52                    ..                  ..                  ..
+53    4.3570000000000002  4.2640000000000002  4.0709999999999997
+54                    ..                  ..                  ..
+55    -7.476538867211616  19.475652347032636 -15.824063342496302
+56    7.7690000000000001  7.8170000000000002  7.8689999999999998
+57                    ..                  ..                  ..
+58                    ..                  ..                  ..
+59    7.7850000000000001  7.8540000000000001  7.9130000000000003
+60                    ..                  ..                  ..
+61                    ..                  ..                  ..
+62    5.6349999999999998  5.7309999999999999                5.79
+63                    ..                  ..                  ..
+64                    ..                  ..                  ..
+65    7.2539999999999996  7.2750000000000004  7.2859999999999996
+66                    ..                  ..                  ..
+67                    ..                  ..                  ..
+68                  7.61  7.6849999999999996  7.7519999999999998
+69                    ..                  ..                  ..
+70                    ..                  ..                  ..
+71    5.9020000000000001  5.9050000000000002               5.851
+72                    ..                  ..                  ..
+73  -0.41774590244543219  17.164585224964071  19.515889154698513
+74                   6.8  6.8170000000000002  6.8330000000000002
+75                    ..                  ..                  ..
+76    27.680088198526562  3.4854414756414087  2.1589229393195808
+77    6.2960000000000003  6.1909999999999998                6.03
+78                    ..                  ..                  ..
+79    -13.76511826271323  33.333022781658627  8.4505528569852117
+80    7.2560000000000002  7.2119999999999997  7.1879999999999997
+81                    ..                  ..                  ..
+82                    ..                  ..                  ..
+83    6.8869999999999996  6.9409999999999998  7.0030000000000001
+84                    ..                  ..                  ..
+85                    ..                  ..                  ..
+86    7.0460000000000003  7.0119999999999996                6.97
+87                    ..                  ..                  ..
+88                    ..                  ..                  ..
+89    3.4430000000000001  3.3820000000000001  3.2789999999999999
+90                    ..                  ..                  ..
+91                    ..                  ..                  ..
+92    2.7559999999999998  2.7269999999999999                2.69
+93                    ..                  ..                  ..
+94                    ..                  ..                  ..
+95    6.6719999999999997  6.6230000000000002  6.5679999999999996
+96                    ..                  ..                  ..
+97                    ..                  ..                  ..
+98    6.4889999999999999  6.4950000000000001  6.4939999999999998
+99                    ..                  ..                  ..
+100                   ..                  ..                  ..
+101   6.9589999999999996               6.984  7.0119999999999996
+102                   ..                  ..                  ..
+103                   ..                  ..                  ..
+104   3.4609999999999999               3.319                3.19
+105                   ..                  ..                  ..
+106                   ..                  ..                  ..
+107   7.2309999999999999                7.23                7.23
+108                   ..                  ..                  ..
+109                 &lt;NA&gt;                &lt;NA&gt;                &lt;NA&gt;
+110                 &lt;NA&gt;                &lt;NA&gt;                &lt;NA&gt;
+                   1965               1966                1967
+1    11.852870220462592 4.2419530862414234  12.884694571234888
+2    6.7709999999999999              6.766                6.79
+3                    ..                 ..                  ..
+4                    ..                 ..                  ..
+5    6.6050000000000004 6.3070000000000004               5.806
+6                    ..                 ..                  ..
+7   -6.0426764016277161 3.2178825845760741  2.1375102753022901
+8    4.3639999999999999 4.2590000000000003  4.1440000000000001
+9                    ..                 ..                  ..
+10                   ..                 ..                  ..
+11   6.3369999999999997 6.3620000000000001  6.3929999999999998
+12                   ..                 ..                  ..
+13  -3.1923839646512846 29.734470287273894 -9.2601451816265552
+14   6.3330000000000002 6.1589999999999998  5.9569999999999999
+15                   ..                 ..                  ..
+16                   ..                 ..                  ..
+17   7.8410000000000002 7.8680000000000003  7.8929999999999998
+18                   ..                 ..                  ..
+19                   ..                 ..                  ..
+20                 4.04               3.94                3.84
+21                   ..                 ..                  ..
+22   10.382610137168598 4.7436797477649009 -4.1543847810835075
+23   5.9409999999999998 5.8810000000000002  5.8250000000000002
+24                   ..                 ..                  ..
+25   23.768211880971577  11.35134276567004   13.92748277380089
+26   7.2220000000000004 7.2140000000000004                7.19
+27                   ..                 ..                  ..
+28                   ..                 ..                  ..
+29   6.1289999999999996              6.093  6.0510000000000002
+30                   ..                 ..                  ..
+31                   ..                 ..                  ..
+32   6.1779999999999999               6.19               6.202
+33                   ..                 ..                  ..
+34   32.356108274643248 2.4868059931995674  2.7536134874023332
+35   7.4420000000000002               7.41               7.359
+36                   ..                 ..                  ..
+37                   ..                 ..                  ..
+38                 1.82               1.89  2.0099999999999998
+39                   ..                 ..                  ..
+40                   ..                 ..                  ..
+41   6.1349999999999998 6.0209999999999999  5.8879999999999999
+42                   ..                 ..                  ..
+43                   ..                 ..                  ..
+44                 7.02 7.0220000000000002  7.0289999999999999
+45                   ..                 ..                  ..
+46                   ..                 ..                  ..
+47                  2.6               2.58                 2.5
+48                   ..                 ..                  ..
+49                   ..                 ..                  ..
+50                 2.14               1.58                2.23
+51                   ..                 ..                  ..
+52                   ..                 ..                  ..
+53   3.8809999999999998              3.819  3.7690000000000001
+54                   ..                 ..                  ..
+55    7.638810156201032 49.219084583344596  6.7517383755976397
+56                7.923 7.9550000000000001  7.9530000000000003
+57                   ..                 ..                  ..
+58                   ..                 ..                  ..
+59   7.9320000000000004              7.992  8.0589999999999993
+60                   ..                 ..                  ..
+61                   ..                 ..                  ..
+62   5.7190000000000003 5.6920000000000002  5.6680000000000001
+63                   ..                 ..                  ..
+64                   ..                 ..                  ..
+65   7.3140000000000001               7.34  7.3259999999999996
+66                   ..                 ..                  ..
+67                   ..                 ..                  ..
+68   7.8230000000000004              7.891  7.9320000000000004
+69                   ..                 ..                  ..
+70                   ..                 ..                  ..
+71   5.7679999999999998 5.6769999999999996               5.569
+72                   ..                 ..                  ..
+73   42.238262322272021 7.9830788798946628   4.173332065062624
+74                6.819               6.79  6.7530000000000001
+75                   ..                 ..                  ..
+76   10.645463811815063 2.0932447530594089  13.369396395115444
+77   5.8360000000000003 5.6349999999999998  5.4329999999999998
+78                   ..                 ..                  ..
+79  -9.4155105786634152 2.8673352496099653  12.194833537423676
+80   7.1710000000000003 7.1559999999999997  7.1440000000000001
+81                   ..                 ..                  ..
+82                   ..                 ..                  ..
+83                 7.07 7.1449999999999996  7.2270000000000003
+84                   ..                 ..                  ..
+85                   ..                 ..  38.995844496675261
+86   6.9320000000000004 6.8890000000000002  6.8449999999999998
+87                   ..                 ..                  ..
+88                   ..                 ..                  ..
+89   3.1859999999999999              3.093  2.9119999999999999
+90                   ..                 ..                  ..
+91                   ..                 ..                  ..
+92                 2.66              2.625  2.5910000000000002
+93                   ..                 ..                  ..
+94                   ..                 ..                  ..
+95                6.524 6.5110000000000001  6.5090000000000003
+96                   ..                 ..                  ..
+97                   ..                 ..                  ..
+98   6.4950000000000001 6.4950000000000001                6.51
+99                   ..                 ..                  ..
+100                  ..                 ..                  ..
+101  7.0419999999999998 7.0659999999999998  7.1020000000000003
+102                  ..                 ..                  ..
+103                  ..                 ..                  ..
+104  2.9129999999999998 2.7210000000000001  2.5579999999999998
+105                  ..                 ..                  ..
+106                  ..                 ..                  ..
+107  7.2309999999999999 7.1959999999999997               7.157
+108                  ..                 ..                  ..
+109                &lt;NA&gt;               &lt;NA&gt;                &lt;NA&gt;
+110                &lt;NA&gt;               &lt;NA&gt;                &lt;NA&gt;
+          1968.[YR1968]       1969.[YR1969]        1970.[YR1970]
+1    34.923628430805195 -7.8834765427466635  -7.0779787809132415
+2    6.7910000000000004               6.806   6.8390000000000004
+3                    ..                  ..                   ..
+4                    ..                  ..                   ..
+5                 6.508  6.1749999999999998                6.085
+6                    ..                  ..                   ..
+7    9.4577420055817782  5.0449927395436021   6.4551785151485035
+8    4.0250000000000004  3.9020000000000001                3.778
+9                    ..                  ..                   ..
+10                   ..                  ..                   ..
+11   6.4320000000000004  6.4770000000000003   6.5279999999999996
+12                   ..                  ..                   ..
+13   14.523782228676367 -2.2157282668281226   29.258607280155047
+14   5.7370000000000001  5.5060000000000002   5.2759999999999998
+15                   ..                  ..                   ..
+16                   ..                  ..                   ..
+17   7.9119999999999999  7.9269999999999996   7.9359999999999999
+18                   ..                  ..                   ..
+19                   ..                  ..                   ..
+20                 3.77                3.83                 3.85
+21                   ..                  ..                   ..
+22  -2.0622412997334578  11.038775992276385 -0.16552635476253386
+23                 5.76  5.6840000000000002   5.6239999999999997
+24                   ..                  ..                   ..
+25   23.589173992150037  8.5086693608167394     9.33437882831862
+26   7.1189999999999998  7.0069999999999997                6.798
+27                   ..                  ..                   ..
+28                   ..                  ..                   ..
+29   6.0090000000000003  5.9569999999999999   5.9109999999999996
+30                   ..                  ..                   ..
+31                   ..                  ..                   ..
+32   6.2140000000000004  6.2279999999999998   6.2430000000000003
+33                   ..                  ..                   ..
+34   2.3131080442905443   3.321706941222601   5.6875266918262213
+35   7.2949999999999999  7.2279999999999998   7.1719999999999997
+36                   ..                  ..                   ..
+37                   ..                  ..                   ..
+38                 2.06                2.04                 1.98
+39                   ..                  ..                   ..
+40                   ..                  ..                   ..
+41   5.7510000000000003  5.5810000000000004   5.4109999999999996
+42                   ..                  ..  0.40000000596046398
+43                   ..                  ..                   ..
+44                7.056  7.0830000000000002   7.0709999999999997
+45                   ..                  ..                   ..
+46                   ..                  ..                   ..
+47                 2.46  2.4700000000000002                 2.38
+48                   ..                  ..                   ..
+49                   ..                  ..                   ..
+50                 2.13                2.13                 2.13
+51                   ..                  ..   4.8000001907348597
+52                   ..                  ..                   ..
+53                3.629  3.5089999999999999   3.5049999999999999
+54                   ..                  ..                   ..
+55   40.422274299364346  2.5098038589633092   37.748894197168994
+56   7.9480000000000004  7.9470000000000001   7.9429999999999996
+57                   ..                  ..                   ..
+58                   ..                  ..                   ..
+59   8.1349999999999998  8.1920000000000002   8.1809999999999992
+60                   ..                  ..                   ..
+61                   ..                  ..                   ..
+62   5.5759999999999996               5.468   5.3490000000000002
+63                   ..                  ..  0.75999999046325695
+64                   ..                  ..                   ..
+65   7.2779999999999996               7.181   7.0250000000000004
+66                   ..                  ..                   ..
+67                   ..                  ..                   ..
+68   7.9740000000000002  8.0109999999999992                8.048
+69                   ..                  ..                   ..
+70                   ..                  ..                   ..
+71   5.4480000000000004  5.3159999999999998   5.1879999999999997
+72                   ..                  ..                   ..
+73   15.999202176923433 -7.8779289084105102   5.9256628232792679
+74   6.7069999999999999  6.6260000000000003   6.5289999999999999
+75                   ..                  ..                   ..
+76   6.6118673640911396 -13.864515684871819   47.854789166924661
+77   5.2910000000000004  5.1589999999999998   5.0350000000000001
+78                   ..                  ..                   ..
+79   22.360556653803783   7.360348237218119  -8.0378151002341127
+80   7.1310000000000002  7.1180000000000003   7.0960000000000001
+81                   ..                  ..                   ..
+82                   ..                  ..                   ..
+83   7.2789999999999999               7.327                7.391
+84                   ..                  ..                   ..
+85  -7.2533175237838066   46.46127299851679   41.765275167885676
+86   6.7859999999999996               6.726   6.6820000000000004
+87                   ..                  ..                   ..
+88                   ..                  ..                   ..
+89   2.7949999999999999  2.7909999999999999   2.6869999999999998
+90                   ..                  ..                   ..
+91                   ..                  ..                   ..
+92   2.5659999999999998               2.536                  2.5
+93                   ..                  ..                   ..
+94                   ..                  ..                   ..
+95   6.4630000000000001                6.41   6.3460000000000001
+96                   ..                  ..                   ..
+97                   ..                  ..                   ..
+98   6.5289999999999999               6.524   6.5190000000000001
+99                   ..                  ..                   ..
+100                  ..                  ..                   ..
+101                7.13  7.1150000000000002                7.149
+102                  ..                  ..                   ..
+103                  ..                  ..                   ..
+104               2.464               2.456                 2.48
+105                  ..                  ..                   ..
+106                  ..                  ..                   ..
+107  7.1139999999999999  7.0359999999999996   6.9820000000000002
+108                  ..                  ..                   ..
+109                &lt;NA&gt;                &lt;NA&gt;                 &lt;NA&gt;
+110                &lt;NA&gt;                &lt;NA&gt;                 &lt;NA&gt;
+          1971.[YR1971]       1972.[YR1972]      1973.[YR1973]
+1   -24.084743987338769  -55.64297143675298 96.480849357515183
+2    6.8310000000000004  6.8159999999999998                6.8
+3                    ..                  ..                 ..
+4                    ..                  ..                 ..
+5    5.5229999999999997  5.1120000000000001              4.726
+6                    ..                  ..                 ..
+7   -2.3189007733247848 -20.091769123461617 -6.025939476102252
+8    3.6539999999999999                3.53 3.4089999999999998
+9                    ..                  ..                 ..
+10                   ..                  ..                 ..
+11   6.5819999999999999                6.85 6.8689999999999998
+12                   ..                  ..                 ..
+13   4.2693355289231647 -2.4390984729631953 9.0834085713295281
+14   5.0570000000000004  4.8570000000000002               4.68
+15                   ..                  ..                 ..
+16                   ..                  ..                 ..
+17   7.9409999999999998  7.9420000000000002 7.9390000000000001
+18                   ..                  ..                 ..
+19   2.5064788215627374  15.063066751302443  15.73421368914147
+20                 3.93                3.84               3.71
+21   3.6099998950958301                  ..                 ..
+22    8.361328650294638  -4.580993851509092 19.440489494526943
+23   5.5650000000000004  5.4820000000000002 5.4020000000000001
+24  0.34000000357627902                  ..                 ..
+25   1.2571780865067979  33.928183574031436  4.256373155098899
+26   6.5490000000000004  6.2569999999999997 6.0609999999999999
+27                   ..                  ..                 ..
+28                   ..                  ..                 ..
+29   5.8769999999999998  5.8490000000000002 5.8109999999999999
+30  0.18999999761581399                  ..                 ..
+31                   ..                  ..                 ..
+32   6.2619999999999996  6.2830000000000004 6.3079999999999998
+33                   ..                  ..                 ..
+34   1.9708728609550263  7.0413556772021053 3.3918906747915258
+35   7.1130000000000004  7.0579999999999998 6.9850000000000003
+36                   ..                  ..                 ..
+37                   ..                  ..                 ..
+38                 1.93                1.93               1.93
+39                   ..                  ..                 ..
+40                   ..                  ..                 ..
+41   5.2569999999999997               5.077 4.8659999999999997
+42                   ..                  ..                 ..
+43                   ..                  ..                 ..
+44   7.0549999999999997               7.024 6.9859999999999998
+45                   ..                  ..                 ..
+46  -6.5367816983288947  2.2580766858756363 13.215095063632319
+47                  2.4                2.35 2.2999999999999998
+48                   ..                  ..                 ..
+49  0.86472289040868588  9.8442784964274352 11.871069519940306
+50                 2.16                2.14               2.14
+51                   ..                  ..                 ..
+52                   ..                  ..                 ..
+53   3.5339999999999998  3.5529999999999999              3.508
+54                   ..                  ..                 ..
+55   1.4075634808141615 -8.1651737410849279 20.939011470691014
+56   7.9219999999999997  7.8940000000000001               7.86
+57                   ..                  ..                 ..
+58                   ..                  ..                 ..
+59                 8.15  8.1170000000000009 8.0619999999999994
+60                   ..                  ..                 ..
+61                   ..                  ..                 ..
+62   5.2119999999999997  5.0599999999999996 4.9950000000000001
+63                   ..                  ..                 ..
+64                   ..                  ..                 ..
+65   6.8390000000000004  6.6369999999999996               6.43
+66                   ..                  ..                 ..
+67                   ..                  ..                 ..
+68   8.0960000000000001  8.0730000000000004 8.0470000000000006
+69                   ..                  ..                 ..
+70                   ..                  ..                 ..
+71                 5.05  4.9119999999999999               4.79
+72                   ..                  ..                 ..
+73  -3.1888486070604358  11.449786804228054 14.277673215367486
+74   6.4189999999999996  6.2809999999999997 6.1210000000000004
+75                   ..                  ..                 ..
+76  -19.693196842718393 -3.3696086122251501 53.103897527831805
+77   4.9240000000000004  4.8220000000000001 4.7270000000000003
+78                   ..                  ..                 ..
+79   17.994955195611922  -22.87570325091302 4.2374221981978337
+80   7.0679999999999996  7.0419999999999998 7.0110000000000001
+81                   ..                  ..                 ..
+82                   ..                  ..                 ..
+83   7.3840000000000003  7.3739999999999997              7.399
+84                   ..                  ..                 ..
+85   1.5351263655327188 -17.584053049635884 5.3199289121634621
+86   6.6159999999999997  6.5449999999999999 6.4809999999999999
+87                   ..                  ..                 ..
+88                   ..                  ..                 ..
+89                2.673  2.6110000000000002              2.512
+90                   ..                  ..                 ..
+91                   ..                  ..                 ..
+92   2.4700000000000002                2.44 2.4079999999999999
+93                   ..                  ..                 ..
+94                   ..                  ..                 ..
+95   6.2930000000000001  6.2279999999999998 6.1509999999999998
+96                   ..                  ..                 ..
+97                   ..                  ..                 ..
+98   6.5190000000000001  6.5019999999999998 6.4640000000000004
+99                   ..                  ..                 ..
+100                  ..                  ..                 ..
+101               7.181  7.1849999999999996 7.1929999999999996
+102                  ..                  ..                 ..
+103  5.4500860744549442  7.8170056899995615 8.9874851444330091
+104               2.266  2.0099999999999998              1.879
+105                  ..                  ..                 ..
+106                  ..                  ..                 ..
+107  6.9390000000000001  6.9420000000000002 6.9420000000000002
+108                  ..                  ..                 ..
+109                &lt;NA&gt;                &lt;NA&gt;               &lt;NA&gt;
+110                &lt;NA&gt;                &lt;NA&gt;               &lt;NA&gt;
+           1974.[YR1974]       1975.[YR1975]       1976.[YR1976]
+1       147.331646032913 -22.088928773518603  18.251090174993038
+2     6.7779999999999996  6.7279999999999998                6.66
+3    0.10000000149011599                  ..                  ..
+4                     ..                  ..                  ..
+5                   4.17  3.5710000000000002  3.2349999999999999
+6                     ..                  ..                  ..
+7     19.114351099855512 -22.771296718530351 -14.815859664267109
+8     3.2930000000000001  3.1819999999999999  3.0779999999999998
+9                     ..                  ..                  ..
+10                    ..                  ..                  ..
+11    6.8639999999999999  6.8760000000000003  6.8929999999999998
+12                    ..                  ..                  ..
+13    19.827893770534359 -18.017792704423286  9.3073593058575597
+14    4.5270000000000001  4.3979999999999997  4.2850000000000001
+15                    ..                  ..                  ..
+16                    ..                  ..                  ..
+17    7.9290000000000003                7.91  7.8769999999999998
+18                    ..                  ..                  ..
+19  -0.57323716094968802 -21.939260197260609  17.228168587056132
+20                  3.59                3.37                3.29
+21                    ..                  ..                  ..
+22   -5.1470438434596417 -10.067899028756301  18.279932556823653
+23    5.3250000000000002  5.1950000000000003                5.13
+24                    ..                  ..                  ..
+25     50.75399120794961  35.189228039677488  29.767462604326624
+26                 5.968  5.9470000000000001  6.0659999999999998
+27                    ..                  ..                  ..
+28                    ..                  ..                  ..
+29    5.7809999999999997  5.7480000000000002                5.71
+30                    ..                  ..                  ..
+31                    ..                  ..                  ..
+32    6.3360000000000003               6.367                 6.4
+33                    ..                  ..                  ..
+34    18.325823506386897  7.1391011033433642  19.112643620437126
+35    6.9130000000000003  6.8659999999999997  6.8140000000000001
+36                    ..                  ..                  ..
+37                    ..                  ..                  ..
+38                  2.27                2.35                2.23
+39                    ..                  ..                  ..
+40                    ..                  ..                  ..
+41    4.6379999999999999                4.45                4.28
+42                    ..                  ..                  ..
+43                    ..                  ..                  ..
+44                 6.952  6.9130000000000003  6.8559999999999999
+45                    ..                  ..                  ..
+46    9.7307247904380887 -17.684866557310869  12.296837239231493
+47    2.2799999999999998                2.17                2.04
+48                    ..                  ..                  ..
+49   -6.4509029115370708 -5.1991628585750504  3.6721684261733998
+50    2.0499999999999998                1.91                1.85
+51                    ..                  ..                  ..
+52                    ..                  ..                  ..
+53    3.4529999999999998  3.3980000000000001  3.3319999999999999
+54                    ..                  ..                  ..
+55   -5.3839167803143511 -31.501833811597493  11.933705751755113
+56    7.8220000000000001  7.7949999999999999  7.7670000000000003
+57                    ..                  ..                  ..
+58                    ..                  ..                  ..
+59    7.9969999999999999  7.9249999999999998  7.8319999999999999
+60                    ..                  ..                  ..
+61                    ..                  ..                  ..
+62                 4.665  4.4359999999999999  4.2130000000000001
+63                    ..                  ..                  ..
+64                    ..                  ..                  ..
+65    6.2329999999999997  6.0590000000000002  5.8959999999999999
+66                    ..                  ..                  ..
+67                    ..                  ..                  ..
+68                  8.02  7.9770000000000003  7.9320000000000004
+69                    ..                  ..                  ..
+70                    ..                  ..                  ..
+71    4.6539999999999999  4.5209999999999999  4.3940000000000001
+72                    ..                  ..                  ..
+73    17.186804097701554  2.2998753284784641 0.27278955497519064
+74    5.9470000000000001  5.7389999999999999  5.5430000000000001
+75                    ..                  ..                  ..
+76     52.45271530479468  -44.62314741060662  28.763666701591717
+77    4.6189999999999998  4.5010000000000003  4.3979999999999997
+78                    ..                  ..                  ..
+79    6.2326014027952681 -4.0815701700718989 -16.223211957619355
+80    6.9930000000000003  6.9710000000000001  6.9539999999999997
+81                    ..                  ..                  ..
+82                    ..                  ..                  ..
+83    7.3769999999999998  7.3209999999999997  7.2919999999999998
+84                    ..                  ..                  ..
+85     31.86068130295601  30.773194494968379  18.112856675336801
+86    6.3970000000000002  6.2990000000000004  6.1749999999999998
+87                    ..                  ..                  ..
+88                    ..                  ..                  ..
+89    2.4340000000000002  2.3809999999999998  2.3519999999999999
+90                    ..                  ..                  ..
+91                    ..                  ..                  ..
+92    2.3769999999999998               2.351  2.3260000000000001
+93                    ..    10.1000003814697                  ..
+94                    ..                  ..                  ..
+95    6.0570000000000004               5.976  5.8849999999999998
+96                    ..                  ..                  ..
+97                    ..                  ..                  ..
+98    6.4109999999999996  6.3529999999999998  6.2910000000000004
+99                    ..  4.0599999427795401                  ..
+100                   ..                  ..                  ..
+101   7.1920000000000002  7.2009999999999996               7.194
+102                   ..                  ..                  ..
+103   -4.828723397332368 -12.416551966128267  14.971700350574935
+104                1.835               1.774               1.738
+105                   ..                  ..                  ..
+106                   ..                  ..                  ..
+107   6.8789999999999996  6.8319999999999999  6.7709999999999999
+108                   ..                  ..                  ..
+109                 &lt;NA&gt;                &lt;NA&gt;                &lt;NA&gt;
+110                 &lt;NA&gt;                &lt;NA&gt;                &lt;NA&gt;
+          1977.[YR1977]       1978.[YR1978]        1979.[YR1979]
+1     26.22433566860083  25.810653794010889   11.378518993664017
+2    6.5830000000000002  6.5090000000000003   6.4210000000000003
+3                    ..                  ..                   ..
+4                    ..                  ..                   ..
+5    2.8439999999999999  2.7160000000000002   2.7450000000000001
+6                    ..                  ..                   ..
+7    15.447839834350432  17.375997494046189   16.849963342437576
+8    2.9809999999999999  2.8919999999999999   2.8119999999999998
+9                    ..                  ..                   ..
+10                   ..                  ..                   ..
+11   6.8959999999999999               6.891   6.9050000000000002
+12                   ..                  ..                   ..
+13   16.244268720856184  6.9145287419163566 -0.31652337363011895
+14   4.1630000000000003  3.9980000000000002   3.8879999999999999
+15                   ..                  ..                   ..
+16                   ..                  ..                   ..
+17   7.8280000000000003  7.6689999999999996                7.625
+18                   ..                  ..                   ..
+19   16.866005516798069   10.28050726974412   16.377799666471233
+20                 3.24                3.21                 3.21
+21                   ..                  ..                   ..
+22   16.630064506009674  18.998255038958803  -11.632643705689659
+23   5.0069999999999997  4.8879999999999999   4.8079999999999998
+24                   ..                  ..                   ..
+25   1.8576998013954977 -18.853707062278318  -33.471254281234437
+26   6.1790000000000003  6.3440000000000003   6.5490000000000004
+27                   ..                  ..                   ..
+28                   ..                  ..                   ..
+29   5.6740000000000004  5.6420000000000003   5.5940000000000003
+30                   ..                  ..                   ..
+31                   ..                  ..                   ..
+32   6.4340000000000002                6.44                 6.45
+33                   ..                  ..                   ..
+34   3.0241119146873672  5.0582551839624301   14.949437682924426
+35   6.7320000000000002  6.6340000000000003   6.5309999999999997
+36                   ..                  ..                   ..
+37                   ..                  ..                   ..
+38                 2.15                2.06   2.0099999999999998
+39                   ..                  ..                   ..
+40                   ..                  ..                   ..
+41   4.1159999999999997  3.9670000000000001                 3.86
+42                   ..                  ..                   ..
+43                   ..                  ..                   ..
+44   6.7949999999999999               6.726   6.6619999999999999
+45                   ..                  ..                   ..
+46  -6.2057232631662913  2.6973822308202102    7.496238047879487
+47                 1.93                1.84                 1.73
+48                   ..                  ..                   ..
+49   3.0392442034134604  7.5021138992729846   6.4033603103401617
+50                  1.8                1.79                 1.77
+51                   ..                  ..                   ..
+52                   ..                  ..                   ..
+53   3.2570000000000001  3.1560000000000001                3.137
+54                   ..                  ..                   ..
+55   35.839233289463152  23.861777684483513  -24.493717620019055
+56   7.7290000000000001  7.6660000000000004   7.5979999999999999
+57                   ..                  ..  0.60000002384185802
+58                   ..                  ..                   ..
+59   7.7229999999999999  7.5940000000000003   7.4480000000000004
+60                   ..                  ..                   ..
+61                   ..                  ..                   ..
+62   4.0039999999999996  3.8380000000000001   3.7189999999999999
+63                   ..                  ..                   ..
+64                   ..                  ..                   ..
+65   5.7119999999999997  5.5209999999999999   5.3330000000000002
+66                   ..                  ..                   ..
+67                   ..                  ..                   ..
+68   7.8719999999999999  7.7889999999999997                 7.68
+69                   ..                  ..                   ..
+70                   ..                  ..                   ..
+71   4.2789999999999999  4.1760000000000002                4.077
+72                   ..                  ..                   ..
+73  -5.7460067158297647  14.045260281680342   15.616795784494599
+74   5.3609999999999998               5.202   4.9640000000000004
+75                   ..                  ..                   ..
+76   38.912229374974515   8.180797462414489   3.3737647412597624
+77                4.282  4.1790000000000003   4.0910000000000002
+78                   ..                  ..                   ..
+79  -6.0315567241672596 0.67515558238780216   73.490081278106089
+80   6.9269999999999996  6.9039999999999999   6.8719999999999999
+81                   ..                  ..                   ..
+82                   ..                  ..                   ..
+83                7.266  7.2290000000000001   7.2329999999999997
+84                   ..                  ..                   ..
+85   25.308998252086724 -31.304182441457442 -0.97472335759343309
+86   6.0359999999999996                5.91   5.8490000000000002
+87                   ..                  ..                   ..
+88                   ..                  ..                   ..
+89   2.3069999999999999  2.2469999999999999   2.1970000000000001
+90                   ..                  ..                   ..
+91                   ..                  ..                   ..
+92                2.306  2.2839999999999998   2.2639999999999998
+93                   ..                  ..                   ..
+94                   ..                  ..                   ..
+95                5.806  5.7679999999999998   5.7329999999999997
+96                   ..                  ..                   ..
+97                   ..                  ..                   ..
+98   6.2229999999999999  6.1509999999999998   6.0590000000000002
+99                   ..                  ..                   ..
+100                  ..                  ..                   ..
+101  7.1829999999999998  7.1630000000000003   7.1420000000000003
+102                  ..                  ..                   ..
+103  11.020787224881474  10.680415943312525   3.8530986027513876
+104                1.79                1.76   1.8080000000000001
+105                  ..                  ..                   ..
+106                  ..                  ..                   ..
+107  6.7130000000000001  6.6580000000000004                 6.59
+108                  ..                  ..                   ..
+109                &lt;NA&gt;                &lt;NA&gt;                 &lt;NA&gt;
+110                &lt;NA&gt;                &lt;NA&gt;                 &lt;NA&gt;
+           1980.[YR1980]       1981.[YR1981]          1982.[YR1982]
+1     17.447236326136007  22.856336056592696     8.5900927692281073
+2     6.3259999999999996  6.2370000000000001     6.1180000000000003
+3                     ..   0.259999990463257                     ..
+4                     ..                  ..                     ..
+5     2.7389999999999999  2.7919999999999998                  2.972
+6                     ..                  ..    0.52999997138977095
+7     21.904055670968063  16.757911811497223    -38.301027291038551
+8     2.7440000000000002  2.6890000000000001     2.6480000000000001
+9                     ..                  ..                     ..
+10                    ..                  ..                     ..
+11    6.9080000000000004  6.9420000000000002     6.9610000000000003
+12                    ..                  ..                     ..
+13    10.875348637094049  13.234582712339659     5.3333561184943505
+14                 3.798               3.706     3.6179999999999999
+15                    ..                  ..                     ..
+16                    ..                  ..                     ..
+17    7.5860000000000003  7.5389999999999997     7.4880000000000004
+18                    ..                  ..                     ..
+19   -15.247762181983262  9.2075272608023795      5.065038409498996
+20                  3.21                3.05                   2.94
+21                    ..  6.4899997711181596                     ..
+22      8.56470992689691 -5.4808228281644489     3.0125595112656214
+23    4.7750000000000004  4.6980000000000004                   4.62
+24                    ..  1.0599999427795399                     ..
+25     15.19331354875824  -13.41245353520732    -6.8634221376969435
+26                  6.63  6.6180000000000003     6.5860000000000003
+27                    ..                  ..                     ..
+28                    ..                  ..                     ..
+29    5.5570000000000004  5.5330000000000004     5.5259999999999998
+30                    ..                  ..    0.44999998807907099
+31                    ..                  ..                     ..
+32    6.4589999999999996  6.4589999999999996     6.4870000000000001
+33                    ..                  ..                     ..
+34    16.726332836319429  13.199195097441432     7.5027517143294631
+35    6.4180000000000001  6.3010000000000002     6.1790000000000003
+36                    ..                  ..                     ..
+37                    ..                  ..                     ..
+38                  1.91                1.88                    1.8
+39                    ..                  ..                     ..
+40                    ..                  ..                     ..
+41                  3.77  3.7189999999999999     3.6779999999999999
+42   0.89999997615814198                  ..                     ..
+43                    ..                  ..                     ..
+44                 6.593  6.5259999999999998                   6.46
+45                    ..                  ..                     ..
+46    8.3291691981560945 -8.6735502136933746    -1.6878787094665881
+47                  1.64                1.58                   1.56
+48                    ..                  ..                     ..
+49  -0.93181490775829445  2.9398380968515596 -7.6982294550717256E-2
+50                  1.75                1.74                   1.77
+51    9.5299997329711896                  ..                     ..
+52                    ..                  ..                     ..
+53    3.0920000000000001               3.052                   3.02
+54                    ..                  ..                     ..
+55    13.653099647807366 -4.7231942594658989    -22.720807960868186
+56    7.5309999999999997  7.4539999999999997     7.3449999999999998
+57                    ..                  ..                     ..
+58                    ..                  ..                     ..
+59    7.2869999999999999  7.1210000000000004     6.9589999999999996
+60                    ..                  ..                     ..
+61                    ..                  ..                     ..
+62    3.5880000000000001                3.51     3.4580000000000002
+63                    ..                  ..       1.79999995231628
+64                    ..                  ..                     ..
+65    5.1840000000000002  5.0209999999999999     4.8479999999999999
+66                    ..                  ..                     ..
+67                    ..                  ..                     ..
+68    7.5430000000000001  7.3710000000000004     7.1619999999999999
+69                    ..                  ..                     ..
+70                    ..                  ..                     ..
+71    4.0110000000000001  3.9529999999999998                  3.855
+72                    ..                  ..                     ..
+73    12.745729032752621   15.20624395277747    -24.460611696574531
+74    4.7389999999999999  4.5739999999999998     4.4249999999999998
+75                    ..                  ..                     ..
+76    6.9346300422232332  15.090559788139714     29.770473478745316
+77    4.0350000000000001  4.0019999999999998     3.9670000000000001
+78    1.0199999809265099                  ..                     ..
+79   -10.082703289125135 -30.804080622628632    -27.475813779470798
+80    6.8380000000000001               6.774     6.6989999999999998
+81                    ..                  ..                     ..
+82                    ..                  ..                     ..
+83                 7.226  7.1909999999999998     7.1459999999999999
+84                    ..                  ..                     ..
+85    10.792827993615191 -8.0256363808324807      9.411637875733561
+86    5.7839999999999998                5.71     5.6040000000000001
+87                    ..                  ..                     ..
+88                    ..                  ..                     ..
+89    2.2170000000000001  2.1930000000000001     2.1859999999999999
+90                    ..                  ..                     ..
+91                    ..                  ..                     ..
+92    2.2440000000000002  2.2240000000000002     2.2029999999999998
+93                    ..                  ..                     ..
+94                    ..                  ..                     ..
+95    5.6909999999999998  5.6509999999999998     5.6029999999999998
+96                    ..                  ..                     ..
+97                    ..                  ..                     ..
+98    5.9530000000000003  5.8140000000000001     5.6580000000000004
+99                    ..                  ..                     ..
+100                   ..                  ..                     ..
+101   7.1130000000000004  7.1180000000000003                   7.11
+102                   ..                  ..                     ..
+103    -7.70410637804207  6.7710001763890375    -10.176142369058155
+104   1.8394999999999999  1.8120000000000001     1.8274999999999999
+105                   ..                  ..                     ..
+106                   ..                  ..                     ..
+107   6.5170000000000003  6.4450000000000003     6.3330000000000002
+108                   ..                  ..                     ..
+109                 &lt;NA&gt;                &lt;NA&gt;                   &lt;NA&gt;
+110                 &lt;NA&gt;                &lt;NA&gt;                   &lt;NA&gt;
+           1983.[YR1983]          1984.[YR1984]       1985.[YR1985]
+1       4.51215854906701     9.9560357303426912  5.9237765983185966
+2     5.9059999999999997     5.7320000000000002  5.5389999999999997
+3                     ..                     ..                  ..
+4                     ..                     ..                  ..
+5     2.5590000000000002     2.6070000000000002               2.633
+6                     ..                     ..                  ..
+7    -15.034859047128563     18.844605268619844   9.974912621683842
+8     2.6190000000000002                  2.601  2.5920000000000001
+9                     ..                     ..                  ..
+10                    ..                     ..                  ..
+11    6.9790000000000001     7.0149999999999997  7.0369999999999999
+12                    ..                     ..                  ..
+13   -2.1504068007468362    -5.8916669422811765 -9.6431497261211518
+14    3.5009999999999999                   3.35  3.2250000000000001
+15                    ..                     ..                  ..
+16                    ..                     ..                  ..
+17    7.4169999999999998     7.3520000000000003  7.2729999999999997
+18                    ..                     ..                  ..
+19   -10.725090728317383    0.33119024767150052 -8.4562582470729666
+20                  2.74                   2.58                2.48
+21                    ..                     ..                  ..
+22     6.774625739359962     5.0361202073258511   7.968947640016367
+23    4.5650000000000004                  4.516  4.4320000000000004
+24                    ..                     ..                  ..
+25    30.312231139878065    -23.381675818351994 -9.7490407069748244
+26    6.5279999999999996     6.4329999999999998               6.242
+27                    ..                     ..                  ..
+28                    ..                     ..                  ..
+29    5.5129999999999999     5.5049999999999999  5.4950000000000001
+30                    ..                     ..                  ..
+31                    ..                     ..                  ..
+32    6.4870000000000001     6.5119999999999996  6.5270000000000001
+33                    ..                     ..                  ..
+34    1.1304554165019169     6.3260252599393709  1.2418074109368717
+35    6.0590000000000002     5.9349999999999996  5.8159999999999998
+36                    ..                     ..                  ..
+37                    ..                     ..                  ..
+38                  1.75                   1.75                1.85
+39                    ..                     ..                  ..
+40                    ..                     ..                  ..
+41                 3.637     3.5409999999999999                3.47
+42                    ..                     ..                  ..
+43                    ..                     ..                  ..
+44    6.3869999999999996     6.3209999999999997  6.2460000000000004
+45                    ..                     ..                  ..
+46   -2.7887057877924519     5.5933423318083868  3.6886074944581679
+47                  1.51                   1.46                1.42
+48                    ..                     ..                  ..
+49     -2.48456025946777     5.4251486976160095  9.8714057105464974
+50                   1.8                   1.81                1.76
+51                    ..                     ..                  ..
+52                    ..                     ..                  ..
+53    3.0680000000000001     3.1459999999999999  3.2080000000000002
+54                    ..                     ..                  ..
+55   -9.9474398669774189    0.71701968512658709   28.02778883629162
+56                 7.218     7.0830000000000002                6.96
+57                    ..                     ..                  ..
+58                    ..                     ..                  ..
+59    6.8120000000000003     6.6710000000000003  6.5339999999999998
+60                    ..                     ..                  ..
+61                    ..                     ..                  ..
+62                 3.411     3.3239999999999998  3.2120000000000002
+63                    ..                     ..                  ..
+64                    ..                     ..                  ..
+65    4.6580000000000004                  4.452               4.218
+66                    ..                     ..                  ..
+67                    ..                     ..                  ..
+68                  6.91     6.6219999999999999  6.3280000000000003
+69                    ..     5.1999998092651403                  ..
+70                    ..                     ..                  ..
+71                 3.734     3.6579999999999999  3.5329999999999999
+72                    ..                     ..                  ..
+73   -27.350386899777348     5.4330477853218326  11.063054159206615
+74    4.2960000000000003     4.1840000000000002  4.0869999999999997
+75                    ..                     ..                  ..
+76    6.8479386845361887     10.589738531237742 -39.151027771550162
+77    3.9279999999999999     3.8849999999999998  3.8039999999999998
+78                    ..                     ..                  ..
+79  -0.53396598052293598     4.8540851884729648  2.4436911232890139
+80    6.6260000000000003     6.5469999999999997  6.4560000000000004
+81                    ..                     ..                  ..
+82                    ..                     ..                  ..
+83    7.0919999999999996     7.0250000000000004  6.9390000000000001
+84                    ..                     ..                  ..
+85   -16.011645335417896     19.805534775794726  8.1809225828053371
+86                  5.41     5.1989999999999998  4.9880000000000004
+87                    ..                     ..                  ..
+88                    ..                     ..                  ..
+89    2.1659999999999999     2.1360000000000001               2.129
+90                    ..                     ..                  ..
+91                    ..                     ..                  ..
+92    2.1840000000000002                  2.165               2.141
+93                    ..                     ..                  ..
+94                    ..                     ..                  ..
+95    5.5469999999999997     5.4889999999999999  5.4329999999999998
+96                    ..                     ..                  ..
+97                    ..                     ..                  ..
+98    5.4820000000000002     5.3029999999999999               5.125
+99                    ..                     ..                  ..
+100  -2.9923401668828831 -7.9329958226892927E-2  -2.505954466317533
+101   7.0679999999999996                  7.024  7.0369999999999999
+102                   ..                     ..                  ..
+103   8.6705504107583096     23.742371439183714  2.4029358481413254
+104   1.7989999999999999                 1.8065  1.8440000000000001
+105                   ..                     ..                  ..
+106                   ..                     ..                  ..
+107   6.1970000000000001     6.0439999999999996  5.8710000000000004
+108                   ..                     ..                  ..
+109                 &lt;NA&gt;                   &lt;NA&gt;                &lt;NA&gt;
+110                 &lt;NA&gt;                   &lt;NA&gt;                &lt;NA&gt;
+          1986.[YR1986]        1987.[YR1987]       1988.[YR1988]
+1    5.6137899723900659   10.290120028019885   1.531963669466478
+2    5.3019999999999996   5.0750000000000002  4.8490000000000002
+3                    ..                   ..                  ..
+4                    ..                   ..                  ..
+5    2.7210000000000001                 2.76  2.5390000000000001
+6                    ..                   ..                  ..
+7    2.4179115941080624   26.843044273917656  11.605901178167983
+8                 2.589                 2.59  2.5910000000000002
+9                    ..                   ..                  ..
+10   7.2347584715612356   9.2468122477015129 -10.821685992304538
+11   7.0670000000000002   7.1050000000000004  7.1539999999999999
+12                   ..                   ..                  ..
+13   4.3519800336855354    9.214484575383679  8.0093412379574858
+14   3.1469999999999998   3.0870000000000002  3.0390000000000001
+15                   ..                   ..                  ..
+16                   ..                   ..                  ..
+17   7.1870000000000003                 7.09  6.9690000000000003
+18                   ..                   ..                  ..
+19  -2.8424941016880041  -7.0256043216512722  1.1526026253282851
+20                 2.44   2.3199999999999998                2.17
+21                   ..                   ..                  ..
+22   3.5873180828744893   13.172277227057648  12.303095586122907
+23                4.399   4.3109999999999999  4.2220000000000004
+24                   ..                   ..                  ..
+25  -3.8233076982132133 -0.89697010543841316 -35.072361486687782
+26   6.0110000000000001   5.7190000000000003  5.4340000000000002
+27                   ..                   ..                  ..
+28                   ..                   ..                  ..
+29   5.4790000000000001   5.4710000000000001  5.4720000000000004
+30                   ..                   ..                  ..
+31                   ..                   ..                  ..
+32                6.548   6.5709999999999997  6.5609999999999999
+33                   ..                   ..                  ..
+34   3.7706228162802518   2.1858655227440238  4.6246899134223582
+35                  5.7   5.5810000000000004               5.468
+36                   ..                   ..                  ..
+37                   ..                   ..                  ..
+38                 1.84                 1.82                1.81
+39                   ..                   ..                  ..
+40                   ..                   ..                  ..
+41   3.3809999999999998   3.3050000000000002  3.2280000000000002
+42                   ..                   ..                  ..
+43                   ..                   ..                  ..
+44   6.1820000000000004   6.1139999999999999  6.0519999999999996
+45                   ..                   ..                  ..
+46  0.90389409472741988   5.0658086977646803  4.3325724678490758
+47                 1.35                 1.33                1.36
+48                   ..                   ..                  ..
+49   5.1797669422565065     6.64815402519325  15.558972171551062
+50                 1.72                 1.69                1.66
+51                   ..                   ..                  ..
+52                   ..                   ..                  ..
+53   3.1890000000000001   3.1219999999999999  3.0009999999999999
+54                   ..                   ..                  ..
+55  -18.359479975954429   22.241416166318672  1.7644209250250924
+56                 6.84   6.6859999999999999  6.5149999999999997
+57                   ..                   ..                  ..
+58                   ..                   ..                  ..
+59   6.3869999999999996   6.1959999999999997  6.0110000000000001
+60                   ..                   ..                  ..
+61                   ..                   ..                  ..
+62   3.1059999999999999                3.024  2.9820000000000002
+63                   ..                   ..                  ..
+64                   ..                   ..                  ..
+65   4.0030000000000001                3.827               3.702
+66                   ..                   ..                  ..
+67                   ..                   ..                  ..
+68   6.0220000000000002                5.718                5.41
+69                   ..                   ..                  ..
+70                   ..                   ..                  ..
+71   3.4660000000000002                 3.42  3.3919999999999999
+72                   ..                   ..                  ..
+73  -18.881780250585251     5.54145805719115   11.99883033829316
+74   3.9710000000000001   3.8029999999999999                3.64
+75                   ..                   ..                  ..
+76  0.43225392809853247    1.596510761670217  31.844879683451438
+77   3.6989999999999998   3.5649999999999999  3.5019999999999998
+78                   ..                   ..                  ..
+79   7.7735530508937103   14.153558343208644  39.299176487389758
+80                6.343                6.242  6.1779999999999999
+81                   ..                   ..                  ..
+82                   ..                   ..                  ..
+83   6.8460000000000001   6.7309999999999999  6.5830000000000002
+84                   ..                   ..                  ..
+85  0.25479392466280615  -4.1226356622726712  6.3585927369231854
+86   4.7720000000000002   4.5830000000000002  4.3940000000000001
+87                   ..                   ..                  ..
+88                   ..                   ..                  ..
+89   2.0910000000000002   2.0699999999999998  2.0059999999999998
+90                   ..                   ..                  ..
+91                   ..                   ..                  ..
+92   2.1059999999999999   2.0619999999999998  2.0110000000000001
+93                   ..                   ..                  ..
+94                   ..                   ..                  ..
+95   5.3819999999999997   5.3280000000000003                5.27
+96                   ..                   ..                  ..
+97                   ..                   ..                  ..
+98   4.9989999999999997                4.883  4.7679999999999998
+99                   ..                   ..                  ..
+100  2.4747295468595496   36.865303404842251  23.258302556090626
+101  7.0830000000000002                 7.12  7.1020000000000003
+102                  ..                   ..                  ..
+103  1.8112387621075783   3.4994604819257376  1.6888908930052082
+104  1.8374999999999999   1.8720000000000001  1.9339999999999999
+105                  ..                   ..                  ..
+106                  ..                   ..                  ..
+107  5.6879999999999997                  5.5  5.2789999999999999
+108                  ..                   ..                  ..
+109                &lt;NA&gt;                 &lt;NA&gt;                &lt;NA&gt;
+110                &lt;NA&gt;                 &lt;NA&gt;                &lt;NA&gt;
+            1989.[YR1989]       1990.[YR1990]       1991.[YR1991]
+1         4.9256150530328  5.5154095752352248  2.4592025910785935
+2      4.6950000000000003  4.5060000000000002  4.2610000000000001
+3                      ..                  ..                  ..
+4                      ..                  ..                  ..
+5                    2.52  2.5139999999999998  1.9339999999999999
+6                      ..                  ..                  ..
+7      26.623001536095529  5.3663581394159081 0.68992944086903663
+8                   2.589  2.5790000000000002  2.5579999999999998
+9                      ..                  ..                  ..
+10     15.558712182011121  11.200923793141797 -19.479385252745161
+11     7.1859999999999999  7.2190000000000003  7.2610000000000001
+12                     ..                  ..                  ..
+13    -7.3267122848319843 -1.1725192939529876 -8.7373855296759615
+14                  3.012  2.9950000000000001  2.9820000000000002
+15                     ..                  ..                  ..
+16                     ..                  ..                  ..
+17                   6.85  6.7190000000000003               6.585
+18                     ..                  ..                  ..
+19      18.30407814870523  23.772220577081953 -6.6644088592240252
+20                   2.08                2.11                2.08
+21                     ..                  ..    12.7299995422363
+22     8.1291782066426066  18.689290830204669  -16.51588711594799
+23     4.1319999999999997  4.0449999999999999  3.9590000000000001
+24                     ..                  ..                  ..
+25     20.254023578570553  24.060964284063701  30.381398695617349
+26     5.1719999999999997  4.9340000000000002  4.5679999999999996
+27                     ..                  ..                  ..
+28    -7.5956531568054118  10.557402874069922  4.6324772648922448
+29                  5.444  5.4139999999999997  5.3170000000000002
+30                     ..                  ..                  ..
+31                     ..                  ..                  ..
+32                  6.548  6.5149999999999997               6.484
+33                     ..                  ..                  ..
+34     8.8322246607242363  39.125229026410778  19.000252301048562
+35     5.3540000000000001  5.2709999999999999  5.1909999999999998
+36                     ..                  ..                  ..
+37                     ..                  ..                  ..
+38                   1.82                1.87                1.87
+39                     ..                  ..                  ..
+40                     ..                  ..                  ..
+41     3.1859999999999999               3.181  3.1829999999999998
+42                     ..                  ..                  ..
+43                     ..                  ..                  ..
+44     5.9880000000000004  5.9290000000000003  5.8330000000000002
+45                     ..                  ..                  ..
+46     3.8525573514608453  4.7567102600070967  0.4203610056759004
+47                   1.33                1.33                 1.3
+48                     ..                  ..                  ..
+49     9.2127738833865749  7.3230943831398889  2.9861479823763943
+50                   1.57                1.54                1.53
+51                     ..                  ..                  ..
+52                     ..                  .. -43.899999996897179
+53     2.8660000000000001  2.7450000000000001               2.677
+54     11.699999809265099                  ..                  ..
+55     10.133178146727673 -6.9948964646167724 -7.8450613471559905
+56     6.3319999999999999  6.1349999999999998                5.94
+57                     ..                  ..                  ..
+58                     ..                  ..                  ..
+59                  5.798  5.5439999999999996                5.33
+60                     ..                  ..                  ..
+61                     ..                  ..                  ..
+62                   2.93  2.9550000000000001  2.9969999999999999
+63                     ..                  ..    2.57999992370606
+64                     ..                  ..                  ..
+65                  3.593  3.4870000000000001  3.3980000000000001
+66                     ..                  ..                  ..
+67                     ..                  ..                  ..
+68     5.0910000000000002  4.7759999999999998  4.4610000000000003
+69                     ..                  ..                  ..
+70                     ..                  ..  57.668664066290489
+71                  3.363  3.2679999999999998  3.1619999999999999
+72                     ..                  ..                  ..
+73     4.4472164997565073  11.101544269825766  7.5398115099890646
+74                  3.532               3.444               3.363
+75                     ..                  ..                  ..
+76     12.823348801532532  8.4101287954193111  48.594119192354697
+77     3.3130000000000002  3.3039999999999998               3.339
+78                     ..                  ..  3.3586777715891798
+79  -6.728171806200578E-2  16.743140332061785 -36.141101693898982
+80                  6.149                6.14  6.1180000000000003
+81                     ..                  ..                  ..
+82                     ..                  ..                  ..
+83     6.3860000000000001                6.13  5.7960000000000003
+84                     ..                  ..                  ..
+85     18.997273902518103  1.7401755037056859   2.664202272415821
+86     4.2169999999999996  4.0599999999999996  3.9470000000000001
+87                     ..                  ..                  ..
+88                     ..                  ..                  ..
+89     1.9379999999999999  1.9450000000000001  2.0150000000000001
+90                     ..                  ..                  ..
+91                     ..                  ..                  ..
+92     1.9339999999999999  1.8480000000000001               1.786
+93                     ..                  ..                  ..
+94                     ..                  ..                  ..
+95     5.2110000000000003  5.1660000000000004                5.13
+96                     ..                  ..                  ..
+97                     ..                  ..                  ..
+98     4.6500000000000004  4.5060000000000002  4.2510000000000003
+99                     ..                  ..                  ..
+100   -4.8330334421377756   1.489556415674187   2.869886741089033
+101    7.0449999999999999  7.0140000000000002  6.9429999999999996
+102                    ..                  ..                  ..
+103    3.6226402829841078 -1.0270819781147367  -5.253830557334453
+104    2.0139999999999998               2.081              2.0625
+105                    ..                  ..                  ..
+106                    ..                  ..                  ..
+107    5.0730000000000004  4.8760000000000003  4.7149999999999999
+108                    ..                  ..                  ..
+109                  &lt;NA&gt;                &lt;NA&gt;                &lt;NA&gt;
+110                  &lt;NA&gt;                &lt;NA&gt;                &lt;NA&gt;
+           1992.[YR1992]       1993.[YR1993]       1994.[YR1994]
+1      4.007492561476738  11.164002602016424  9.2375434828786638
+2     4.0270000000000001  3.8319999999999999  3.7370000000000001
+3                     ..                  ..                  ..
+4                     ..                  ..                  ..
+5                  1.776  1.6910000000000001  1.6279999999999999
+6                     ..                  ..                  ..
+7     21.783056276491834  21.106947352246436 0.77411988772423967
+8     2.4780000000000002  2.4300000000000002  2.3769999999999998
+9                     ..                  ..                  ..
+10    11.987897698122978  8.6274236722981357 -0.3304929108617074
+11    7.2960000000000003  7.3369999999999997                7.31
+12                    ..                  ..                  ..
+13    42.984924718055197  38.201614294468186  26.712667045624784
+14    2.9830000000000001  2.9780000000000002  2.9369999999999998
+15                    ..                  ..                  ..
+16                    ..                  ..                  ..
+17    6.4260000000000002                6.27  6.1280000000000001
+18                    ..                  ..                  ..
+19   -12.648472379424021 -4.1497482817572831  12.044480864257537
+20                  1.99                 1.9                1.85
+21                    ..                  ..                  ..
+22    12.924464646780763  2.3032416106995868  19.476900442668793
+23    3.8769999999999998  3.7989999999999999  3.7229999999999999
+24                    ..                  ..                  ..
+25   -7.4129550912125097 -27.326536714918049 -30.649543331402768
+26    4.0990000000000002  3.6739999999999999  3.2440000000000002
+27                    ..                  ..                  ..
+28  -0.54852363202161314 -26.007638586923505 -34.862384389769318
+29    5.2080000000000002  5.0990000000000002  4.9909999999999997
+30                    ..                  ..                  ..
+31                    ..                  ..                  ..
+32    6.4530000000000003  6.4089999999999998  6.3579999999999997
+33                    ..                  ..                  ..
+34    7.9936656577008591  20.783026766217418  26.663318220717386
+35    5.1130000000000004  5.0279999999999996  4.9349999999999996
+36                    ..                  ..                  ..
+37   -20.358556066010237  32.346675222185127  19.789009389018105
+38                  1.77                1.68                1.64
+39                    ..                  ..                  ..
+40                    ..                  ..                  ..
+41    3.1880000000000002  3.1989999999999998               3.226
+42                    ..                  ..                  ..
+43                    ..                  ..                  ..
+44                 5.718               5.609  5.4880000000000004
+45                    ..                  ..                  ..
+46   -1.8117499714672931 -14.014116048548658  4.6930039059398325
+47                   1.3                1.25                1.21
+48                    ..                  ..                  ..
+49    -3.611084840548088  -3.060422766411051 -2.2513441626069124
+50                   1.5                1.46                 1.5
+51                    ..                  ..                  ..
+52   -2.6000000028113703 -61.299999998396835  33.199999996839352
+53    2.5840000000000001  2.4830000000000001  2.3780000000000001
+54                    ..                  ..                  ..
+55   -18.223722882568936  14.969075044859565  9.0873867156985995
+56                  5.74               5.569  5.4379999999999997
+57                    ..                  ..                  ..
+58                    ..                  ..                  ..
+59    5.1369999999999996  4.9720000000000004               4.819
+60                    ..                  ..                  ..
+61                    ..                  ..                  ..
+62    3.0259999999999998  2.9870000000000001                2.93
+63                    ..                  ..                  ..
+64                    ..                  ..                  ..
+65    3.3530000000000002  3.3130000000000002  3.2719999999999998
+66                    ..                  ..                  ..
+67                    ..                  ..                  ..
+68    4.1619999999999999               3.883               3.649
+69                    ..                  ..                  ..
+70    38.389160014791031  28.890514973934557  38.740170776327147
+71                 3.052  2.9369999999999998               2.823
+72                    ..                  ..                  ..
+73    14.117674403862708 -2.5993073943261322  18.499333324973804
+74    3.2850000000000001  3.2109999999999999  3.1320000000000001
+75                    ..                  ..                  ..
+76   -13.280528632051812  36.815968598262145  4.2420054894376307
+77    3.3730000000000002  3.3639999999999999  3.3460000000000001
+78                    ..                  ..                  ..
+79    9.6017976035652595  8.5172278511882098 -12.094917155343481
+80    6.0819999999999999  6.0620000000000003  6.0419999999999998
+81                    ..                  ..                  ..
+82                    ..                  ..                  ..
+83    5.4349999999999996  5.0629999999999997  4.6879999999999997
+84                    ..                  ..                  ..
+85    1.3879228214331363 -3.8766820047625004  0.8078953742397772
+86    3.7570000000000001               3.548  3.4129999999999998
+87                    ..                  ..                  ..
+88                    ..                  ..                  ..
+89    2.0129999999999999  1.9550000000000001  1.9359999999999999
+90                    ..                  ..                  ..
+91                    ..                  ..                  ..
+92    1.7549999999999999  1.7490000000000001               1.756
+93                    ..                  ..                  ..
+94                    ..                  ..                  ..
+95    5.0940000000000003  5.0229999999999997  4.9370000000000003
+96                    ..                  ..                  ..
+97                    ..                  ..                  ..
+98    4.0880000000000001               3.819  3.7610000000000001
+99                    ..                  ..                  ..
+100  -4.4822938205239637  5.5465453853881712  10.306445533747691
+101   6.9130000000000003  6.8860000000000001               6.899
+102                   ..                  ..                  ..
+103   5.5054855221481631  5.3794413291690972  9.0348963696708324
+104   2.0459999999999998  2.0194999999999999  2.0015000000000001
+105                   ..                  ..                  ..
+106                   ..                  ..                  ..
+107   4.5670000000000002               4.391  4.2839999999999998
+108   3.3800001144409202                  ..                  ..
+109                 &lt;NA&gt;                &lt;NA&gt;                &lt;NA&gt;
+110                 &lt;NA&gt;                &lt;NA&gt;                &lt;NA&gt;
+          1995.[YR1995]        1996.[YR1996]        1997.[YR1997]
+1    9.6081626573366634   11.951675808994693   6.4594454025226753
+2    3.5880000000000001   3.5049999999999999   3.5019999999999998
+3                    ..                   ..                   ..
+4                    ..   13.192104730097583   5.2249509029218473
+5    1.5880000000000001                1.554   1.5269999999999999
+6                    ..                   ..                   ..
+7    34.207765125974561    7.785481441474289   9.0798046446022767
+8    2.3530000000000002   2.2839999999999998                2.202
+9                    ..                   ..                   ..
+10  -19.737436305398674   56.896829868372379   1.6600824441717776
+11                 7.29   7.2919999999999998                7.274
+12                   ..                   ..                   ..
+13   6.0658982024653483  -12.019939846776154 -0.64483438412942462
+14                 2.85   2.7679999999999998   2.7429999999999999
+15                   ..                   ..                   ..
+16                   ..                   ..                   ..
+17   6.0380000000000003   5.9539999999999997   5.9020000000000001
+18                   ..                   ..                   ..
+19   24.092480192004359   16.059049481080208    18.46231183592171
+20                 1.84                 1.88                 1.93
+21                   ..                   ..                   ..
+22    7.780467348297023  0.90908161957079869   14.880201037638741
+23   3.6509999999999998   3.5819999999999999   3.5139999999999998
+24                   ..                   ..                   ..
+25   28.786080873334356   28.378249411545681  -2.8353450589847569
+26   2.8519999999999999   2.5419999999999998                2.323
+27                   ..                   ..                   ..
+28    123.5035231935214   11.736904661104305   7.6489249155832653
+29   4.8840000000000003   4.7770000000000001   4.6689999999999996
+30                   ..                   ..                   ..
+31                   ..                   ..                   ..
+32   6.2880000000000003   6.2050000000000001   6.1230000000000002
+33                   ..      1.6599999666214                   ..
+34    18.16042679425756   27.806246585970243   23.510692477493109
+35                4.835   4.7130000000000001                 4.59
+36                   ..                   ..                   ..
+37   1.2690726886167312   5.0580815526587628   9.9451275504798531
+38                 1.57                 1.46                 1.37
+39                   ..                   ..                   ..
+40                   ..                   ..                   ..
+41                3.238                 3.23   3.2210000000000001
+42                   ..                   ..                   ..
+43                   ..                   ..                   ..
+44                 5.36   5.2489999999999997                5.194
+45                   ..                   ..                   ..
+46   6.9991240014470861 -0.49026059276019396   3.3251394405958052
+47                 1.19                  1.2                 1.22
+48                   ..                   ..                   ..
+49   4.2536051028723847   7.1487923174119459  -1.6681801708897837
+50                 1.42                 1.43                 1.39
+51                   ..                   ..                   ..
+52  -42.399999999999814  -29.600000000000108   5.6000000000000512
+53   2.2530000000000001   2.0840000000000001                 1.97
+54                   ..                   ..                   ..
+55   8.4041419237810686   9.9831136671277392   8.5473430201640639
+56   5.3719999999999999   5.3070000000000004   5.2679999999999998
+57                   ..                   ..                   ..
+58                   ..                   ..                   ..
+59   4.6760000000000002                4.508   4.3179999999999996
+60                   ..                   ..                   ..
+61                   ..                   ..                   ..
+62                2.851                 2.77                2.677
+63                   ..                   ..                   ..
+64                   ..                   ..                   ..
+65   3.2480000000000002   3.2229999999999999   3.1349999999999998
+66                   ..                   ..                   ..
+67                   ..                   ..                   ..
+68   3.4420000000000002   3.2559999999999998   3.1320000000000001
+69                   ..                   ..                   ..
+70   6.9755702411140987    7.572596581144353  -12.825412904963272
+71   2.7250000000000001                2.698   2.6669999999999998
+72                   ..                   ..                   ..
+73  -29.269684307534376   12.648671478997883   12.709208822783324
+74                3.044                2.964   2.8860000000000001
+75                   ..                   ..                   ..
+76   33.731571475832709 -0.27631453035502318   16.828936292454273
+77   3.3170000000000002   3.2970000000000002   3.2269999999999999
+78                   ..   5.5199999809265101                   ..
+79   2.6477957671132515   11.573726147041796   7.3137250228429735
+80   6.0359999999999996   6.0309999999999997   6.0229999999999997
+81                   ..                   ..                   ..
+82                   ..                   ..                   ..
+83   4.2919999999999998                3.859   3.4769999999999999
+84                   ..                   ..                   ..
+85   7.8911729205103143   4.3268745196158704   7.3698849887144036
+86   3.2949999999999999   3.2290000000000001   3.1469999999999998
+87                   ..                   ..                   ..
+88                   ..                   ..                   ..
+89                1.958   1.9219999999999999   1.8859999999999999
+90                   ..                   ..                   ..
+91                   ..                   ..                   ..
+92   1.7829999999999999   1.8240000000000001   1.8839999999999999
+93                   ..                   ..                   ..
+94                   ..                   ..                   ..
+95   4.8470000000000004   4.7519999999999998                4.657
+96                   ..                   ..                   ..
+97                   ..                   ..                   ..
+98                3.278                 3.06   2.8250000000000002
+99                   ..                   ..                   ..
+100  41.957728217610764   6.9296851781275706  -2.6570998853075736
+101  6.8710000000000004                6.835   6.8559999999999999
+102                  ..                   ..                   ..
+103  2.8645613167597901   7.5917218760010172    9.481771549639717
+104               1.978                1.976   1.9710000000000001
+105                  ..                   ..                   ..
+106                  ..                   ..                   ..
+107  4.1529999999999996   4.1100000000000003   4.0750000000000002
+108                  ..                   ..                   ..
+109                &lt;NA&gt;                 &lt;NA&gt;                 &lt;NA&gt;
+110                &lt;NA&gt;                 &lt;NA&gt;                 &lt;NA&gt;
+          1998.[YR1998]       1999.[YR1999]       2000.[YR2000]
+1    9.1131635845983539  8.5866015912858842  7.1176903661358608
+2                 3.427  3.3570000000000002  3.2789999999999999
+3                    ..                  ..                  ..
+4    8.6932180129047651  6.3688629351164678   7.295359909557348
+5                 1.522                1.53  1.6279999999999999
+6                    ..                  ..    3.07999992370606
+7    3.4546670432143287 -15.529765822862757  14.302041741385693
+8                 2.149  2.0739999999999998  2.0459999999999998
+9                    ..                  ..                  ..
+10  -7.0483862406397435 -19.701009294771794  68.492605710268094
+11                7.266  7.2619999999999996  7.2489999999999997
+12                   ..                  ..                  ..
+13  -6.3081359477452281 -38.629975401865401  12.263304233371144
+14   2.7170000000000001               2.637  2.5739999999999998
+15                   ..                  ..                  ..
+16                   ..                  ..                  ..
+17   5.8540000000000001  5.8049999999999997  5.7729999999999997
+18                   ..                  ..                  ..
+19   15.483474394227173  9.1675109169825788  6.7102991125667018
+20                 1.94                 1.9                1.89
+21                   ..                  ..                  ..
+22   3.7791838752808644  17.634883430344189 -5.5257164880106586
+23   3.4460000000000002               3.383                3.35
+24                   ..                  ..                  ..
+25   1.3215421636703581  3.7256623219576994  4.3617777975798049
+26                 2.19               2.089  1.9990000000000001
+27                   ..                  ..                  ..
+28   -3.241652908729634  23.959391781724932  18.669140610788617
+29   4.5609999999999999               4.452  4.3899999999999997
+30                   ..                  ..                  ..
+31                   ..                  ..                  ..
+32   6.0510000000000002  5.9850000000000003  5.9180000000000001
+33                   ..                  ..                  ..
+34   8.0695104946555603  10.550349404712193  6.7281575986573188
+35   4.4729999999999999  4.3659999999999997  4.2889999999999997
+36                   ..                  ..                  ..
+37   19.240871735968483 0.83113807328338396  5.3186031578138113
+38                 1.32                1.28                1.32
+39                   ..                  ..                  ..
+40                   ..                  ..                  ..
+41   3.1819999999999999               3.125  3.0569999999999999
+42                   ..                  ..                  ..
+43                   ..                  ..                  ..
+44   5.1120000000000001  5.0350000000000001                4.92
+45                   ..                  ..                  ..
+46   3.4677348163841799  4.8952855890507436  5.6842642206823797
+47                 1.22                1.23                1.26
+48                   ..                  ..                  ..
+49  -4.8747484114307582 -4.5301751751145218  2.9134431794879561
+50                 1.38                1.34                1.36
+51                   ..                  ..                  ..
+52  -2.8000000000000398  9.7000000000000171  10.700000000000045
+53   1.9379999999999999  1.9019999999999999  1.8979999999999999
+54                   ..  39.759998321533203                  ..
+55   20.783247677969158 -8.1342797958975552   11.11414383304367
+56   5.2439999999999998  5.1769999999999996  5.1360000000000001
+57                   ..                  ..                  ..
+58                   ..                  ..                  ..
+59   4.1120000000000001  3.9710000000000001  3.8639999999999999
+60                   ..                  ..                  ..
+61                   ..                  ..                  ..
+62   2.5739999999999998  2.4649999999999999  2.3450000000000002
+63                   ..                  ..                  ..
+64                   ..                  ..                  ..
+65   3.0390000000000001               2.952               2.887
+66                   ..                  ..                  ..
+67                   ..                  ..                  ..
+68   3.0430000000000001               2.972  2.9060000000000001
+69                   ..                  ..                  ..
+70   1.7554688659550521 -19.380616813813361 -4.9240675261455635
+71   2.6480000000000001  2.6309999999999998                 2.6
+72                   ..                  ..                  ..
+73   7.2898849412933941  5.3253860945641662  3.0382140745989261
+74   2.8149999999999999  2.7629999999999999               2.714
+75                   ..                  ..                  ..
+76  -43.241840631386509  2.9227676908397484  37.656838447762766
+77                 3.12  3.0680000000000001  2.9420000000000002
+78                   ..                  ..  9.8999996185302699
+79   17.904333078540134   2.864563667500903  16.369896201957147
+80                5.992  5.8390000000000004               5.665
+81                   ..                  ..                  ..
+82                   ..                  ..                  ..
+83   3.1709999999999998               2.899  2.6909999999999998
+84                   ..                  ..                  ..
+85   17.980324859381525 -2.0186253397334895  1.8123453958878173
+86   3.0369999999999999  2.8820000000000001               2.774
+87                   ..                  ..                  ..
+88                   ..                  ..                  ..
+89                1.893  1.8839999999999999               1.903
+90                   ..                  ..                  ..
+91                   ..                  ..                  ..
+92                1.954  2.0070000000000001  2.0819999999999999
+93                   ..                  ..                  ..
+94                   ..                  ..                  ..
+95   4.6029999999999998               4.556  4.5369999999999999
+96                   ..                  ..                  ..
+97                   ..                  ..                  ..
+98   2.7650000000000001  2.7930000000000001  2.7330000000000001
+99                   ..                  ..                  ..
+100  3.7136506582276354   13.95879066130621 -6.9874831292578818
+101  6.8369999999999997  6.8250000000000002  6.7880000000000003
+102                  ..                  ..                  ..
+103  8.6676568935126284  7.9333096753964298  6.0985869511306561
+104  1.9990000000000001  2.0074999999999998               2.056
+105                  ..                  ..                  ..
+106                  ..                  ..                  ..
+107  4.0670000000000002               4.056  4.0090000000000003
+108                  ..                  ..                  ..
+109                &lt;NA&gt;                &lt;NA&gt;                &lt;NA&gt;
+110                &lt;NA&gt;                &lt;NA&gt;                &lt;NA&gt;
+          2001.[YR2001]       2002.[YR2002]        2003.[YR2003]
+1    7.9347218060633367  7.4201127718929882   7.6573539988475261
+2    3.2029999999999998  3.1259999999999999   3.0289999999999999
+3    3.4900000095367401                  ..                   ..
+4    20.775148354030776  13.056713976231492   23.851013470271326
+5    1.5629999999999999  1.5660000000000001                 1.57
+6                    ..                  ..                   ..
+7    3.2878445451311507  3.4616122354745897   9.6337729364328624
+8    2.0070000000000001  1.9339999999999999                1.885
+9                    ..                  ..                   ..
+10   93.103930876898517  62.145462725277866 -0.60044485429897065
+11   7.2309999999999999  7.2009999999999996   7.1790000000000003
+12                   ..                  ..                   ..
+13    8.423959115630737  10.070367474249849    11.35510320024855
+14   2.5219999999999998  2.4889999999999999   2.4500000000000002
+15                   ..                  ..                   ..
+16                   ..                  ..                   ..
+17   5.7039999999999997               5.641   5.5720000000000001
+18                   ..                  ..                   ..
+19    3.739530495669797  6.0726909640200546   9.4842082534706549
+20                 1.94                1.97                 1.96
+21                   ..                  ..                   ..
+22    4.566380190922132  7.5604003877062951   15.704477223322314
+23   3.3029999999999999  3.2170000000000001   3.1219999999999999
+24                   ..                  ..                   ..
+25   14.769257070505006   18.33611026883662   18.018725645116191
+26   1.9179999999999999  1.8360000000000001   1.8009999999999999
+27                   ..                  ..                   ..
+28  -12.214794940992959 -9.6986016131680657   14.080654225451354
+29   4.2480000000000002               4.125   4.0469999999999997
+30                   ..                  ..                   ..
+31                   ..                  ..                   ..
+32   5.8339999999999996  5.7809999999999997   5.7439999999999998
+33                   ..                  ..                   ..
+34  -3.9011229400612564 -4.5640792169360367   4.8669160297067293
+35   4.1529999999999996                   4   3.8439999999999999
+36                   ..                  ..                   ..
+37  -3.7638348048210162  6.1139398063342583   1.9367095587207359
+38                 1.31                 1.3                 1.27
+39   12.550000190734901                  ..                   ..
+40                   ..                  ..                   ..
+41   2.9580000000000002  2.8439999999999999                 2.75
+42                   ..  2.4300000667571999                   ..
+43                   ..                  ..                   ..
+44   4.7990000000000004  4.6680000000000001   4.5810000000000004
+45                   ..                  ..                   ..
+46   2.4143208418747122  4.2316122665494476  -0.5799149413454785
+47                 1.25                1.27                 1.29
+48   9.1000003814697301                  ..                   ..
+49  -1.0857562608999132 -6.1546455776411619  0.52031901647569612
+50                 1.33                1.32                 1.29
+51                   ..                  ..                   ..
+52   40.499999999999602   11.00000000000027    6.399999999999892
+53   1.9059999999999999               1.956   2.0750000000000002
+54                   ..                  ..                   ..
+55   12.121442523558628 -20.374224708569201   10.005568462063394
+56   5.0940000000000003  5.0270000000000001   4.9370000000000003
+57                   ..                  ..                   ..
+58                   ..                  ..                   ..
+59   3.8029999999999999  3.8050000000000002   3.8159999999999998
+60                   ..                  ..   16.139999389648398
+61                   ..                  ..                   ..
+62   2.2959999999999998  2.2709999999999999   2.2440000000000002
+63                   ..                  ..                   ..
+64                   ..                  ..                   ..
+65                2.839  2.7949999999999999   2.7709999999999999
+66                   ..                  ..                   ..
+67                   ..                  ..                   ..
+68   2.8660000000000001               2.831   2.7970000000000002
+69                   ..                  ..                   ..
+70   4.7634365613773042  1.1160538886689153   4.2087836473796045
+71   2.5760000000000001  2.5230000000000001   2.4569999999999999
+72                   ..                  ..                   ..
+73  -9.0683060345149755  1.0394327599560569   2.0903733327912306
+74   2.6709999999999998               2.633   2.5790000000000002
+75                   ..                  ..                   ..
+76  -24.648786202023771  28.034322462368607  -10.903483137127694
+77   2.8069999999999999  2.6579999999999999                2.601
+78                   ..                  ..                   ..
+79   23.084484280560361 -36.390830326295344   43.794908810527687
+80   5.5279999999999996  5.4119999999999999   5.3289999999999997
+81                   ..                  ..                   ..
+82                   ..                  ..                   ..
+83                2.532  2.4249999999999998   2.3420000000000001
+84                   ..                  ..                   ..
+85   9.3848702905598032  5.1772020894821367   18.636294353029385
+86   2.6859999999999999               2.617   2.6059999999999999
+87                   ..                  ..                   ..
+88                   ..                  ..                   ..
+89                1.855  1.8129999999999999                1.804
+90                   ..                  ..                   ..
+91                   ..                  ..                   ..
+92   2.1760000000000002  2.0059999999999998   1.9139999999999999
+93                   ..                  ..                   ..
+94                   ..                  ..  -9.9807533681605634
+95   4.4950000000000001  4.3819999999999997   4.2930000000000001
+96                   ..                  ..                   ..
+97                   ..  5.5625954015867052   6.9035915475761982
+98   2.6219999999999999  2.5409999999999999   2.4910000000000001
+99                   ..                  ..                   ..
+100  3.9262588598321742  6.5194050233027099   13.516910856169744
+101  6.7569999999999997  6.7350000000000003   6.6710000000000003
+102                  ..                  ..                   ..
+103 -3.9882474631781122 0.48077121196112671   4.1254049931651195
+104              2.0305  2.0205000000000002   2.0474999999999999
+105                  ..                  ..                   ..
+106                  ..                  ..                   ..
+107  3.9830000000000001  3.9249999999999998   3.8620000000000001
+108                  ..  5.7399997711181596                   ..
+109                &lt;NA&gt;                &lt;NA&gt;                 &lt;NA&gt;
+110                &lt;NA&gt;                &lt;NA&gt;                 &lt;NA&gt;
+         2004.[YR2004]          2005.[YR2005]          2006.[YR2006]
+1   8.2085798365067575      9.763639895665051     9.8879533759372578
+2                 2.94     2.8460000000000001     2.7549999999999999
+3                   ..                     ..                     ..
+4   19.195345192531875     10.619143416611792     15.269387736947905
+5                1.605     1.6240000000000001     1.6439999999999999
+6                   ..                     ..                     ..
+7   6.7438011547279473     23.790431574835807     13.522653216375716
+8   1.8440000000000001                  1.825                  1.798
+9                   ..                     ..                     ..
+10                  ..                     ..    -4.4524912150325235
+11                7.16     7.1340000000000003     7.1180000000000003
+12                  ..                     ..                     ..
+13  11.183203325095988     11.472806723416753     16.933809963099634
+14  2.3839999999999999     2.3090000000000002     2.2410000000000001
+15                  ..                     ..                     ..
+16                  ..                     ..                     ..
+17  5.5270000000000001     5.4989999999999997     5.4480000000000004
+18                  ..                     ..                     ..
+19  7.3513745318263091     17.730080278527154     8.7116474422230823
+20                1.93                   1.86                   1.91
+21                  ..                     ..       43.7700004577637
+22  25.120301155870209     16.473393136621837     15.550413621292165
+23  3.0459999999999998     2.9580000000000002                  2.867
+24                  ..                     ..                     ..
+25  5.4725529893970872    -3.4188262185796106     4.9973139201727577
+26                1.78                  1.756     1.7549999999999999
+27                  ..                     ..     15.210000038146999
+28  6.1743654947755857   -0.55816785255650814     37.268925396397321
+29  3.9430000000000001                  3.835     3.7610000000000001
+30                  ..                     ..                     ..
+31                  ..                     ..                     ..
+32  5.7329999999999997     5.7270000000000003     5.7039999999999997
+33                  ..                     ..                     ..
+34  21.933887487421245    -1.1517220717996253     7.2164417872552207
+35                3.71                  3.577     3.4489999999999998
+36                  ..     2.7907563220020402     3.1972080804858298
+37  17.945167356493783   -0.99802199145916859  2.4786469369274755E-2
+38                1.28                   1.31                   1.34
+39                  ..       15.4700002670288                     ..
+40                  ..                     ..                     ..
+41               2.681     2.6480000000000001     2.6589999999999998
+42                  ..                     ..                     ..
+43                  ..                     ..                     ..
+44  4.5270000000000001     4.4459999999999997     4.4589999999999996
+45                  ..                     ..                     ..
+46  1.6346939034500281    -0.2639217647923715     5.2494281935822755
+47                1.34                   1.33                   1.37
+48                  ..       10.8400001525879       11.5200004577637
+49  1.7818283847514493     2.1916220431491524 -6.1171692647647546E-2
+50                1.29                   1.26                   1.32
+51                  ..                     ..                     ..
+52  15.099999999999895     35.000000000000256     31.699999999999989
+53  2.2010000000000001                  2.274                   2.38
+54                  ..                     ..                     ..
+55  7.6275324877611581     13.240485597852228     31.473948887701596
+56  4.8609999999999998     4.8010000000000002     4.7539999999999996
+57                  ..                     ..                     ..
+58                  ..                     ..                     ..
+59  3.7290000000000001                  3.653     3.7109999999999999
+60                  ..                     ..                     ..
+61                  ..                     ..                     ..
+62               2.198     2.1480000000000001                  2.089
+63                  ..                     ..                     ..
+64                  ..                     ..                     ..
+65               2.762     2.7309999999999999                  2.589
+66                  ..                     ..                     ..
+67                  ..                     ..                     ..
+68  2.7730000000000001     2.7650000000000001     2.6989999999999998
+69                  ..                     ..                     ..
+70  9.1465297269180326     1.7114978744513536    -8.8675683962091227
+71  2.3780000000000001     2.2909999999999999     2.2440000000000002
+72                  ..                     ..                     ..
+73  8.5849354827246316     1.4022439910162063     9.4354462616471864
+74               2.536     2.4950000000000001                  2.456
+75                  ..                     ..                     ..
+76  15.092707422717353    -19.118526465597427     15.302287968538323
+77  2.4929999999999999                  2.391     2.3079999999999998
+78                  ..     4.8499999046325701                     ..
+79  27.115910361521429 -6.4790913581575182E-2     18.971196259809801
+80  5.2640000000000002     5.1950000000000003                  5.133
+81                  ..                     ..                     ..
+82                  ..                     ..                     ..
+83               2.262     2.1989999999999998     2.2040000000000002
+84                  ..                     ..       3.32999992370606
+85  9.3850625058137922   -0.90911258485870405     8.3030851750570065
+86  2.6110000000000002                  2.613     2.6110000000000002
+87                  ..                     ..                     ..
+88                  ..                     ..                     ..
+89               1.734                   1.69                   1.73
+90                  ..                     ..                     ..
+91                  ..                     ..                     ..
+92               1.994     2.0059999999999998                  2.101
+93                  ..                     ..                     ..
+94  45.846059865607799     7.7277486910994639     34.885303265940905
+95  4.2140000000000004                  4.133     4.0999999999999996
+96                  ..                     ..                     ..
+97   2.889154814592132     18.223893304795197     14.858836971124134
+98  2.3849999999999998     2.2320000000000002                  1.958
+99                  ..     31.159999847412099                     ..
+100 10.614276529884407     12.457399701065384     20.347842325153209
+101 6.6120000000000001     6.5250000000000004     6.4290000000000003
+102                 ..                     ..                     ..
+103  7.808467862343818     5.6163796419478302     3.0690986986681423
+104 2.0514999999999999     2.0569999999999999     2.1080000000000001
+105                 ..                     ..                     ..
+106                 ..                     ..                     ..
+107 3.7759999999999998     3.6930000000000001     3.6349999999999998
+108                 ..                     ..                     ..
+109               &lt;NA&gt;                   &lt;NA&gt;                   &lt;NA&gt;
+110               &lt;NA&gt;                   &lt;NA&gt;                   &lt;NA&gt;
+          2007.[YR2007]         2008.[YR2008]        2009.[YR2009]
+1    7.1468674755469834    9.8151059251689645   7.3881446491123199
+2    2.6659999999999999                 2.577                2.484
+3                    ..                    ..                   ..
+4      17.4204056480106    13.877841414056164   20.906572990534045
+5    1.6659999999999999    1.7010000000000001                1.714
+6                    ..                    ..                   ..
+7    9.6780904151340508    25.850639145448014  -24.771304938853675
+8    1.8260000000000001                  1.85                1.855
+9                    ..                    ..                   ..
+10    24.00692585540844    39.433299447367233  0.91738319893157438
+11   7.0919999999999996    7.0629999999999997   7.0209999999999999
+12                   ..                    ..                   ..
+13   15.797051427444416    9.0833219784711758   -6.295573424935597
+14   2.1949999999999998    2.1549999999999998   2.0960000000000001
+15                   ..                    ..                   ..
+16                   ..                    ..  -26.538063925755978
+17   5.4029999999999996    5.3570000000000002   5.3319999999999999
+18                   ..                    ..                   ..
+19  -1.1016281086973123   -13.588568837679929   -19.46530460399552
+20   2.0099999999999998                  2.06                 2.06
+21   42.900001525878899    42.054328325577401   44.655186274780398
+22   17.421714759593357   -2.5925117427081119   13.580692690406494
+23   2.7749999999999999    2.7109999999999999   2.6739999999999999
+24                   ..                    ..                   ..
+25   12.996355130191304    9.6733828839989684   3.1532065634451811
+26                1.748    1.7430000000000001                 1.74
+27                   ..      14.2799997329712                   ..
+28  -11.734416855415887    22.794995029921367  -9.6062029565434699
+29   3.6869999999999998                 3.621   3.5649999999999999
+30                   ..                    ..                   ..
+31   1.3374330327860235    21.965315065513551  -19.366608844966692
+32   5.6639999999999997    5.5960000000000001   5.5279999999999996
+33                   ..                    ..                   ..
+34   24.659583660015684    8.9036070090768931  -44.242158755851349
+35                3.351                  3.26                3.173
+36                   ..    3.7025154318536102   3.6956943086149798
+37  -2.1887666912498958    1.6680387908385654   -24.39363893298902
+38                 1.32                  1.35                 1.32
+39                   ..                    ..                   ..
+40                   ..                    ..                   ..
+41                2.681    2.6970000000000001                2.694
+42                   ..                    ..                   ..
+43                   ..    75.966514977253382  -24.456536647544496
+44   4.4039999999999999    4.3730000000000002   4.3780000000000001
+45   10.497885914966201                    ..                   ..
+46   2.4072855800765751   -4.0025269435953561  -15.470578343462108
+47                 1.39                  1.44                 1.44
+48   12.210000038146999      12.9799995422363     13.0100002288818
+49   -0.880873137117689   -2.9021098978516733  -15.966466349774379
+50                 1.34                  1.37                 1.37
+51                   ..                    ..                   ..
+52   23.400000000000006    -12.79999999999994    2.300000000000054
+53   2.4900000000000002    2.6160000000000001                 2.58
+54   60.790000915527301                    ..   56.720001220703097
+55   8.1585283686731884    14.136222779122747   11.092917559380268
+56                4.718                  4.66   4.5670000000000002
+57                   ..                    ..   6.3400001525878897
+58                   ..                    ..                   ..
+59   3.7970000000000002    3.8759999999999999   3.8410000000000002
+60                   ..                  25.5                   ..
+61                   ..                    ..                   ..
+62   2.0230000000000001    1.9530000000000001                1.879
+63                   ..                    ..                   ..
+64                   ..                    ..                   ..
+65   2.4119999999999999                 2.266   2.1549999999999998
+66                   ..                    ..                   ..
+67                   ..                    ..                   ..
+68   2.6480000000000001    2.5990000000000002                2.556
+69                   ..                    ..                   ..
+70   27.520809928360322    25.535363555835659   18.840496485484366
+71   2.2010000000000001    2.1720000000000002   2.1909999999999998
+72                   ..                    ..                   ..
+73   6.7493756847040629    5.5968078713177505  -11.389802934615489
+74   2.4209999999999998                 2.391   2.3639999999999999
+75                   ..                    ..                   ..
+76    9.861848676169501   0.18671405598109914  -29.593294464816566
+77   2.2519999999999998                 2.262   2.2229999999999999
+78                   ..                    ..     14.8999996185303
+79   34.838040082357793    62.719304295401486  -12.950260135852645
+80   5.0830000000000002    5.0430000000000001   5.0030000000000001
+81                   ..                    ..                   ..
+82                   ..                    ..                   ..
+83   2.2930000000000001                 2.371                 2.39
+84                   ..                    ..                   ..
+85   13.379194475372145    22.875523489851048  -2.6686601135934609
+86   2.6179999999999999    2.6120000000000001   2.6240000000000001
+87                   ..                    ..                   ..
+88   65.337971558961698    31.068939451286269   -33.48127098726502
+89                  1.8                  1.89                 1.98
+90                   ..                    ..                   ..
+91                   ..                    ..                   ..
+92                2.206    2.3839999999999999   2.3969999999999998
+93                   ..                    ..                   ..
+94   21.114073647041877     35.72321056702566 -0.88115382929288444
+95                4.117    4.1589999999999998                4.157
+96                   ..                    ..                   ..
+97   39.436355330874164 2.4401939558572394E-2   8.9377650096063235
+98                1.792                 1.516   1.5820000000000001
+99                   ..                    ..                   ..
+100  15.971501462081378    6.0132702299273291   2.4584639146688829
+101  6.3259999999999996                 6.202   6.1239999999999997
+102                  ..                    ..                   ..
+103 -1.6406938561902962   -6.2519250065440417  -16.487262683928989
+104                2.12    2.0720000000000001   2.0019999999999998
+105                  ..                    ..                   ..
+106                  ..                    ..                   ..
+107               3.677    3.7829999999999999                 3.95
+108                  ..                    ..                   ..
+109                &lt;NA&gt;                  &lt;NA&gt;                 &lt;NA&gt;
+110                &lt;NA&gt;                  &lt;NA&gt;                 &lt;NA&gt;
+          2010.[YR2010]         2011.[YR2011]        2012.[YR2012]
+1    8.5646218893021313    9.5609471282075447   10.567729551718301
+2                  2.38    2.3090000000000002   2.2629999999999999
+3                    ..    6.1799998283386204   6.4499998092651403
+4    15.780418670907736    8.7356191317647927   7.6445527995077072
+5    1.6870000000000001    1.6679999999999999                1.798
+6                    ..                    ..                   ..
+7     24.85343918769081    15.157243523191099   12.152332626586286
+8    1.8440000000000001                 1.823                1.798
+9                    ..                    ..                   ..
+10   29.732321520816299    1.3943790700678136   15.310306713868655
+11                 6.99    6.9480000000000004   6.9050000000000002
+12                   ..                    ..                   ..
+13    9.562094879442796    18.515927393291392   2.8867130354438757
+14   2.0099999999999998    1.9379999999999999                1.899
+15                   ..                    ..                   ..
+16   63.620050473249279    -65.82722197317679   218.75437327931525
+17   5.2919999999999998    5.2439999999999998                 5.19
+18                   ..                    ..     3.61681341890821
+19  -13.142964296417986    4.9083036422605204    15.19745810049838
+20   2.0499999999999998    2.0299999999999998                 1.98
+21   45.529998779296903    38.279998779296903                   ..
+22   15.401899462323996    5.4743931278768514   4.2940689653515562
+23   2.5979999999999999                 2.532   2.4700000000000002
+24                   ..    7.1700000762939498                   ..
+25   9.7053297636100098   -4.3266790837899265  -7.1024622587798802
+26   1.7490000000000001                 1.792                1.851
+27     17.5100002288818                    ..   18.370000839233398
+28   49.193533415933501   -20.583204725417147  -17.287870555928691
+29   3.4969999999999999                 3.431   3.3210000000000002
+30                   ..                    ..   8.6883098535664196
+31   8.3474257846712874    29.310622573676284   16.407854718904915
+32   5.4349999999999996    5.3369999999999997   5.2320000000000002
+33   1.8899999856948899                    ..                   ..
+34   12.007877483292063    24.124731466890623  -2.7035382420539662
+35   3.0779999999999998    2.9980000000000002                2.927
+36   4.2016787006945098                    ..                   ..
+37   2.9462228868750913   -2.6560487657434493  -5.4981370701638497
+38                 1.25                  1.23                 1.34
+39                   ..    22.940000534057599                 24.5
+40                   ..                    ..                   ..
+41   2.6840000000000002                 2.694   2.7010000000000001
+42                   ..                    ..                   ..
+43   52.500317471240777    13.249775136519062  -8.1606477491349665
+44   4.4569999999999999    4.5880000000000001   4.5439999999999996
+45                   ..                    ..     11.0813807783975
+46   5.9858137630627937  -0.68248181821689968  -15.597194921018698
+47                 1.44                  1.42                 1.42
+48     13.2799997329712      13.2700004577637   14.199999809265099
+49   2.9081760921139761    3.0526664327850312   2.9672776777133265
+50                 1.39                  1.39                 1.41
+51                   ..                    ..                   ..
+52   1.9999999999997584    5.4000000000000483   12.700000000000131
+53                 2.61                 2.605                 2.64
+54                   ..                    ..                   ..
+55   15.141955835962136    3.1963470319634695   13.097345132743371
+56   4.4459999999999997    4.2839999999999998   4.1159999999999997
+57   6.7600002288818404                    ..                   ..
+58                   ..                    ..                   ..
+59                 3.78                  3.69   3.5680000000000001
+60   25.719999313354499                    ..                   ..
+61                   ..                    ..                   ..
+62   1.7989999999999999    1.7170000000000001   1.6479999999999999
+63                   ..      17.7399997711182                   ..
+64                   ..   -2.3488179001249705   5.1301182824945926
+65                2.044                 1.956                 1.99
+66                   ..                    ..                   ..
+67                   ..   -72.755966039051785   246.33050556048818
+68   2.6030000000000002    2.6459999999999999                 2.68
+69                   ..                    ..                   ..
+70   4.9848082833440941    3.3690514783104959 -0.16306120178722949
+71   2.2559999999999998    2.3199999999999998   2.3450000000000002
+72                   ..                    ..                   ..
+73   7.0013755531215622    9.1170840299123199   2.5426151489127875
+74                 2.34    2.3170000000000002                2.294
+75                   ..                    ..                   ..
+76    73.04875926751302 2.4439587576409849E-2   16.440305511174458
+77   2.1440000000000001                 2.153                2.117
+78   15.699999809265099                    ..                   ..
+79  -15.566564316631698   -3.0474714228276838   2.3340000480626344
+80   4.8959999999999999    4.7370000000000001   4.6130000000000004
+81                   ..                    ..                   ..
+82                   ..                    ..                   ..
+83   2.3490000000000002    2.3069999999999999                2.254
+84                   ..                    ..                   ..
+85  -1.7402740560218604    10.284040718187228 -0.93217766089617271
+86                2.629    2.5950000000000002   2.5430000000000001
+87                   ..                    ..                   ..
+88  -15.016928243471256   -10.047219530164597  0.31918528647491939
+89                  1.7                  1.65                 1.72
+90                   ..                    ..                   ..
+91                   ..                    ..                   ..
+92   2.3849999999999998    2.2200000000000002                2.294
+93                   ..                    ..                   ..
+94  -4.7456877487837232   -18.085155778427819  -13.405509579412765
+95   4.1260000000000003                 4.093   4.0590000000000002
+96                   ..                    ..                   ..
+97   2.8591992292069222   -3.0494464804515218  -4.5220094975271934
+98   1.5649999999999999    1.5389999999999999                1.532
+99                   ..                    ..                   ..
+100  9.5168754772062982    8.7619940432696097   3.1186187740857747
+101  6.0190000000000001    5.8849999999999998   5.7290000000000001
+102                  ..    4.6700211395420501                   ..
+103  10.365946183065716     4.295262994160737   7.7078178513434494
+104               1.931    1.8945000000000001   1.8805000000000001
+105                  ..                    ..                   ..
+106  61.114821009339124    2.8425822145771633  -17.363842630095732
+107                4.04    4.1260000000000003   4.1340000000000003
+108                  ..                    ..                   ..
+109                &lt;NA&gt;                  &lt;NA&gt;                 &lt;NA&gt;
+110                &lt;NA&gt;                  &lt;NA&gt;                 &lt;NA&gt;
+          2013.[YR2013]       2014.[YR2014]       2015.[YR2015]
+1    5.3646417905794266  9.8550513280373195  7.1188007331672196
+2    2.2469999999999999  2.2280000000000002  2.2269999999999999
+3    5.8499999046325701  7.4000000953674299  9.8999996185302699
+4    9.4621997665880144  7.5011759164324872  3.5538596147083581
+5                 1.714  1.7689999999999999                1.67
+6                    ..                  ..                  ..
+7   -2.1730764279206767 -9.0843161911949721  2.0669993374599898
+8                 1.786               1.774  1.7370000000000001
+9                    ..                  ..                  ..
+10    10.76529573020288  17.341071466803527  -12.44017877413728
+11   6.8390000000000004  6.7809999999999997  6.7060000000000004
+12                   ..                  ..                  ..
+13   7.8066242181214989  11.953560210332668 -1.1512248557093585
+14                 1.86  1.8220000000000001  1.7709999999999999
+15                   ..                  ..                  ..
+16   23.212584255898378   21.67407194933017  10.542658960506571
+17   5.1349999999999998  5.0709999999999997                4.97
+18   1.2117742418005299  4.4099998474121103                  ..
+19  -5.5764638475234705  29.269035610397424  54.724771140672459
+20                 1.93                1.89                1.85
+21                   ..                  ..  54.104420443939603
+22  -3.7066549748374484  7.6936222261668092  4.7295235409574161
+23                2.399  2.2930000000000001  2.2890000000000001
+24                   ..                  ..                  ..
+25  -9.0405501933698389  4.0252704602514484 -38.966690818665285
+26                1.913  1.9750000000000001  2.0169999999999999
+27   20.579999923706101                  ..                  ..
+28   9.9918268124109915  6.1412019189811105 -11.198063507940475
+29   3.2210000000000001  3.1640000000000001                3.11
+30                   ..                  ..                  ..
+31  -8.5934670915635252  3.6819609493233543   9.693590393697221
+32   5.1509999999999998                5.07  5.0019999999999998
+33                   ..  2.4900000095367401                  ..
+34  -11.443319911866283   9.377867444650974   22.42767758953083
+35                2.855  2.7930000000000001               2.746
+36     4.80544367746164                  ..                  ..
+37   5.2362676262418546  12.657832261366053 -1.9158932202087584
+38                 1.35                1.44                1.45
+39     30.5100002288818    28.7399997711182  29.069999694824201
+40                   ..                  ..                  ..
+41   2.7109999999999999  2.6949999999999998  2.6669999999999998
+42                   ..                  ..                  ..
+43   61.479128333596378 -5.9306069857247081  24.127810207255251
+44   4.4409999999999998  4.3099999999999996                4.08
+45     16.4799995422363                  ..                  ..
+46  -5.6546468225471642 0.95057067349195279  1.6821767835713928
+47                 1.39                1.38                1.36
+48   14.613797771359399    15.1499996185303    15.8500003814697
+49   2.4952751327387972  2.6045979428576089  3.3169817105101629
+50                 1.43                1.42                1.45
+51                   ..                  ..                  ..
+52   6.7000000000000455  8.5999999999998522  5.5000000000001421
+53                 2.67                2.76  2.7549999999999999
+54                   ..                  ..                  ..
+55   6.4945226917057823  17.119764878765608 -4.0801129234629911
+56   3.9550000000000001               3.843               3.766
+57                   ..                  ..                  ..
+58                   ..                  ..                  ..
+59   3.4489999999999998               3.302               3.141
+60                   ..                  ..                  ..
+61                   ..                  ..                  ..
+62                1.591               1.544               1.508
+63                   ..                  ..                  ..
+64   6.1534032198072168   7.286028957378349  15.484021830469615
+65                1.968                2.06  2.0299999999999998
+66                   ..                  ..                  ..
+67   16.026391653090457 -7.9260800100096702 -43.714502088382623
+68   2.7160000000000002               2.754  2.7109999999999999
+69                   ..                  ..                  ..
+70   11.135294879336726  -5.126612087140856 -3.4713295214591398
+71   2.3610000000000002               2.375  2.3820000000000001
+72                   ..                  ..                  ..
+73  -3.7794722409500991  1.8755482706876592  4.0839710504372562
+74   2.2690000000000001  2.2109999999999999               2.137
+75                   ..                  ..                  ..
+76  -3.8851348564787287 -4.1803728155419293  17.000723866075163
+77   2.0699999999999998  2.0579999999999998               2.008
+78                   ..                  ..                  ..
+79  -4.3021882102506197 -7.8187957543279794  16.137579682601455
+80   4.5270000000000001  4.4210000000000003               4.335
+81                   ..                  ..  6.6488167746399096
+82                   ..                  .. 0.11503068581710352
+83   2.1739999999999999               2.089               2.004
+84                   ..  11.065751084388101                  ..
+85   5.0006735720409097 -2.1968422232661169  5.6225055971965219
+86   2.4780000000000002  2.4249999999999998  2.4060000000000001
+87                   ..                  ..                  ..
+88   1.1423366667299177  5.1085014407631633  7.8788727856457399
+89                 1.73                1.75                 1.7
+90                   ..                  ..                  ..
+91                   ..                  ..                  ..
+92   2.3130000000000002  2.4849999999999999  2.5030000000000001
+93                   ..                  ..                  ..
+94   16.397198402827783  9.5377347879878442  33.232364719170334
+95   4.0389999999999997  3.9990000000000001               3.952
+96                   ..                  ..                  ..
+97  -3.6550492290033958  9.1682664574236554 -4.4236986375182852
+98   1.5269999999999999  1.4830000000000001               1.417
+99                   ..                  ..                  ..
+100  13.029707435971631 -2.1260938710836257 -0.9678984616588906
+101  5.5629999999999997  5.4080000000000004  5.2510000000000003
+102                  ..  5.3413882686117304                  ..
+103  5.1828146346465331  5.1667580746276371  5.7368579129098123
+104  1.8574999999999999              1.8625  1.8434999999999999
+105                  ..                  ..                  ..
+106 -5.4718698262416012  12.730214662210088  5.6543568388788685
+107  4.1109999999999998  4.0110000000000001               3.911
+108                  ..                  ..                  ..
+109                &lt;NA&gt;                &lt;NA&gt;                &lt;NA&gt;
+110                &lt;NA&gt;                &lt;NA&gt;                &lt;NA&gt;
+            2016.[YR2016]         2017.[YR2017]        2018.[YR2018]
+1      8.9093721506821879     8.359573659353785   12.132901224113439
+2      2.2269999999999999    2.2050000000000001   2.1930000000000001
+3        10.0299997329712    10.680000305175801      11.420000076294
+4      6.9230256943766904    6.2913809856613341   6.7586468857009407
+5                   1.772    1.7949999999999999   1.5389999999999999
+6                      ..                    ..                   ..
+7     -4.4584529515901608 7.0816768294719168E-3   9.6798548265926883
+8      1.6859999999999999    1.5629999999999999   1.5429999999999999
+9                      ..                    ..                   ..
+10     -23.72590271546909   -14.143430635933797   28.959012928497401
+11     6.6230000000000002    6.5369999999999999   6.4640000000000004
+12                     ..                    ..   1.5264268590416199
+13   -0.16256762761035759   -3.2283736661884603   1.5041011102213844
+14     1.7190000000000001    1.7170000000000001   1.7150000000000001
+15                     ..                    ..                   ..
+16     11.993533379717732   -1.1295595896088315   11.586400964379237
+17     4.8730000000000002    4.7569999999999997   4.5960000000000001
+18     3.6003696643112399                    ..                   ..
+19     36.182790844265213    4.2880537867221733  -12.337058817176299
+20                   1.81                  1.77                 1.75
+21                     ..    43.900001525878899                   ..
+22     3.6745680776151914    10.836289782314836   10.954733677408711
+23     2.2839999999999998    2.1930000000000001   2.1840000000000002
+24                     ..                    ..   7.9400000572204599
+25     32.816085789353167    10.100247715630744  -11.601461250437666
+26     2.0539999999999998    2.0230000000000001                1.919
+27                     ..                    ..                   ..
+28     4.4153622173423344    10.238042404418607  -5.2851582678175788
+29     3.0539999999999998    2.9849999999999999   2.9239999999999999
+30                     ..                    ..                   ..
+31     134.71636035787017    -55.80338214957002   7.0454434348656605
+32                  4.915    4.7930000000000001   4.6689999999999996
+33                     ..                    ..   2.8399999141693102
+34    -5.1818273661277061    12.558138457547344   7.8652933974009471
+35     2.7040000000000002    2.6629999999999998                2.645
+36                     ..    5.7598675314664298                   ..
+37    -2.6691224788592365    8.2261175777229738    17.09183268092282
+38                   1.53                  1.54                 1.55
+39     28.889999389648398    29.456714138116599   30.808230732794701
+40                     ..                    ..                   ..
+41     2.6339999999999999                 2.593   2.5529999999999999
+42                     ..                    ..   11.441829930960701
+43    -17.480698040281538  -0.36635653173148341   2.6567083690842423
+44                  3.843                  3.64   3.5470000000000002
+45                     ..                    ..                   ..
+46     5.0506734389694827    4.3102186136210037   3.8246901347224167
+47                   1.36                  1.34                 1.31
+48     16.441318170117501    17.623368132835601   18.156277066332901
+49    0.72124364885162606    2.1107800341801095   1.1960968562039653
+50                   1.44                  1.43                 1.42
+51                     ..                    ..                   ..
+52     2.5000000000000568    3.0999999999999943   2.8999999999999631
+53     2.7949999999999999    2.7450000000000001   2.8450000000000002
+54                     ..                    ..   79.040000915527301
+55    -3.9000551354087776    11.987258705074666   -2.339557084552311
+56     3.6890000000000001                 3.609                3.536
+57                     ..                    ..                   ..
+58                     ..                    ..                   ..
+59     3.0720000000000001    2.9940000000000002                2.923
+60                     ..    28.378101412562401   33.639999389648402
+61                     ..                    ..                   ..
+62                  1.464    1.4279999999999999                  1.4
+63                     ..                    ..                   ..
+64     11.553876341697446    1.2366495227874594   4.6378013080351224
+65     2.0609999999999999                  2.16   2.1179999999999999
+66                     ..                    ..                   ..
+67    -18.661192735245621    33.652499381007885   33.897077891174973
+68                  2.673    2.6259999999999999                2.581
+69                     ..                    ..                   ..
+70     12.963204958752712   -1.4757570138561107   5.4162889417233657
+71                   2.39    2.3719999999999999                2.347
+72                     ..                    ..                   ..
+73     1.0458525017553484   -0.2174328966173249 -0.50804763283726118
+74     2.0859999999999999    2.0409999999999999   2.0299999999999998
+75       14.0100002288818      14.4899997711182     15.3400001525879
+76     4.4309637674839308     6.284134943093278  -1.5686001980269708
+77     1.9419999999999999                 1.893   1.8380000000000001
+78     21.719999313354499                    ..                   ..
+79     13.817532398607796   -7.4052522263869918   43.072247824225883
+80     4.2850000000000001    4.2590000000000003   4.2460000000000004
+81                     ..                    ..                   ..
+82     8.4712434549960562    9.1720381505808746   13.842479661996919
+83                  1.903                 1.798                 1.71
+84       17.6328742901498                    ..                   ..
+85     8.0858532247064687    3.0223048296486041   5.2535205755386443
+86     2.3959999999999999                 2.375   2.3540000000000001
+87                     ..                    ..                   ..
+88     40.596422692966229    20.269634008794625   15.300739029449602
+89                    1.8                   1.8                  1.8
+90                     ..                    ..   23.305035349773501
+91                     ..                    ..                   ..
+92     2.5779999999999998    2.4180000000000001   2.4849999999999999
+93                     ..                    ..                   ..
+94    -23.043427998921047    18.176355715787878    14.85106563281218
+95                  3.915                 3.875   3.8340000000000001
+96                     ..                    ..                   ..
+97  1.4476571288213336E-2    0.3201076199772217  -0.7953994492392269
+98     1.3660000000000001                  1.35                1.288
+99                     ..    49.180000305175803   52.470001220703097
+100     11.87811079538676    2.1035954485340227   9.7488706272178263
+101    5.1120000000000001    4.9870000000000001                4.867
+102                    ..    7.2742211361673403                   ..
+103   0.37448962581872536    4.2209959217557156   5.5560844638212927
+104                1.8205    1.7655000000000001               1.7295
+105                    ..                    ..                   ..
+106   0.63560871251027606    4.3595096278571361   37.760389298558039
+107    3.8279999999999998    3.7679999999999998   3.7440000000000002
+108                    ..                    ..                   ..
+109                  &lt;NA&gt;                  &lt;NA&gt;                 &lt;NA&gt;
+110                  &lt;NA&gt;                  &lt;NA&gt;                 &lt;NA&gt;
+            2019.[YR2019]       2020.[YR2020]
+1      6.8802802368661276   3.945871701546082
+2      2.1800000000000002  2.1749999999999998
+3        11.9799995422363                  ..
+4      4.1322447795151476  4.2033784029235761
+5                   1.496               1.236
+6                      ..     15.420000076294
+7      1.2528725576875814 -17.836178515784226
+8                    1.43  1.3069999999999999
+9                      ..                  ..
+10     7.2316722988265809 -10.486420254840695
+11     6.4119999999999999  6.3460000000000001
+12                     ..                  ..
+13     2.9524327320796573 -20.680621495544855
+14                   1.71               1.694
+15     23.190000534057599    24.2700004577637
+16     4.5723135765865806  9.3021644627758491
+17     4.5229999999999997  4.4610000000000003
+18                     ..                  ..
+19     99.690492637427752  -14.63134297626263
+20                   1.71                1.63
+21                     ..                  ..
+22    -2.5894279869937264  -7.392369845047952
+23                   2.12  2.0470000000000002
+24                     ..    10.4899997711182
+25    -7.2571374918876046  10.073433606597163
+26                  1.766                 1.7
+27                     ..                  ..
+28     13.375953701535209 -30.087347046940209
+29     2.8620000000000001  2.8039999999999998
+30                     ..                  ..
+31     4.3963708701553657  51.045208594548143
+32     4.5759999999999996  4.4889999999999999
+33                     ..                  ..
+34    -12.239061671302593 -16.491273072717505
+35     2.6110000000000002               2.577
+36                     ..                  ..
+37     12.174550788785893 -7.7422069221240832
+38                   1.55                1.59
+39     31.317926845960699  32.919998168945298
+40                     ..                  ..
+41     2.5209999999999999  2.4910000000000001
+42       11.9545523274491                  ..
+43     38.634656955435759 -34.923762503036357
+44                   3.48               3.419
+45                     ..                  ..
+46   -0.94097360970559407 -9.9494480863780979
+47                   1.27                1.24
+48     18.432380465923199  18.409999847412099
+49  6.1928377522164624E-2 -5.3882625841048366
+50                   1.36                1.33
+51                     ..  39.450000762939503
+52      12.19999999999996 -1.0000000000000711
+53                   2.89                3.13
+54                     ..                  ..
+55     5.2512721623016176  2.2254346367261775
+56     3.4329999999999998  3.3639999999999999
+57     3.7633273382194599                  ..
+58                     ..                  ..
+59                  2.855  2.7909999999999999
+60     29.267909754602002  33.849998474121101
+61                     ..                  ..
+62                   1.39               1.383
+63                     ..                  ..
+64    -8.4062355548624907 -35.480936390221999
+65     2.0819999999999999  2.0329999999999999
+66                     ..                  ..
+67    -40.258942615485601  32.105449135564982
+68     2.5390000000000001  2.5070000000000001
+69                     ..                  ..
+70    -40.266721568192033 -56.080664427664715
+71                  2.327  2.3079999999999998
+72     28.179225579462798                  ..
+73    -4.2432975233660244 -18.343464299164111
+74                   2.02                1.99
+75                     ..  18.280000686645501
+76    -3.7507095236406798 -12.058405481774699
+77     1.7769999999999999                1.68
+78     23.440000534057599                  ..
+79     5.7439375713464642 -11.260512434255318
+80     4.2210000000000001                4.17
+81                     ..                  ..
+82     -4.062068204740271  -54.26624176658725
+83                   1.64               1.613
+84     25.148374273669798                  ..
+85   -0.21033779620134396 -11.902922797430875
+86     2.3420000000000001  2.3199999999999998
+87                     ..                  ..
+88     1.0874116201712951 -16.068367674986447
+89                    1.8                1.75
+90     24.575167554544901  24.827213982304599
+91                     ..                  ..
+92                  2.403                2.38
+93                     ..                  ..
+94    -3.5674758356083487  30.058533226213711
+95                   3.79               3.738
+96     6.5593724952555101  5.2239602665842497
+97     3.6766149930661527 -20.377510258519521
+98     1.2470000000000001  1.2889999999999999
+99     53.650001525878899                  ..
+100     9.689958281547888  0.1461671240163156
+101    4.7439999999999998  4.6210000000000004
+102    8.8806056552885195                  ..
+103    3.2716551989612839 -3.0063870562924677
+104                 1.706              1.6415
+105                    ..                  ..
+106   -5.1982200005003563 0.83200697215097819
+107    3.7480000000000002               3.754
+108                    ..                  ..
+109                  &lt;NA&gt;                &lt;NA&gt;
+110                  &lt;NA&gt;                &lt;NA&gt;</a:t>
             </a:r>
           </a:p>
         </p:txBody>
@@ -3375,51 +5871,7 @@
             </a:pPr>
             <a:r>
               <a:rPr/>
-              <a:t>Code</a:t>
-            </a:r>
-          </a:p>
-        </p:txBody>
-      </p:sp>
-      <p:sp>
-        <p:nvSpPr>
-          <p:cNvPr id="3" name="Content Placeholder 2"/>
-          <p:cNvSpPr>
-            <a:spLocks noGrp="1"/>
-          </p:cNvSpPr>
-          <p:nvPr>
-            <p:ph idx="1"/>
-          </p:nvPr>
-        </p:nvSpPr>
-        <p:spPr/>
-        <p:txBody>
-          <a:bodyPr/>
-          <a:lstStyle/>
-          <a:p>
-            <a:pPr lvl="0" indent="0" marL="0">
-              <a:buNone/>
-            </a:pPr>
-            <a:r>
-              <a:rPr/>
-              <a:t>When you click the </a:t>
-            </a:r>
-            <a:r>
-              <a:rPr b="1"/>
-              <a:t>Render</a:t>
-            </a:r>
-            <a:r>
-              <a:rPr/>
-              <a:t> button a presentation will be generated that includes both content and the output of embedded code. You can embed code like this:</a:t>
-            </a:r>
-          </a:p>
-          <a:p>
-            <a:pPr lvl="0" indent="0">
-              <a:buNone/>
-            </a:pPr>
-            <a:r>
-              <a:rPr>
-                <a:latin typeface="Courier"/>
-              </a:rPr>
-              <a:t>[1] 2</a:t>
+              <a:t>Slide</a:t>
             </a:r>
           </a:p>
         </p:txBody>
@@ -3430,53 +5882,6 @@
 </file>
 
 <file path=ppt/slides/slide5.xml><?xml version="1.0" encoding="utf-8"?>
-<p:sld xmlns:a="http://schemas.openxmlformats.org/drawingml/2006/main" xmlns:r="http://schemas.openxmlformats.org/officeDocument/2006/relationships" xmlns:p="http://schemas.openxmlformats.org/presentationml/2006/main">
-  <p:cSld>
-    <p:spTree>
-      <p:nvGrpSpPr>
-        <p:cNvPr id="1" name=""/>
-        <p:cNvGrpSpPr/>
-        <p:nvPr/>
-      </p:nvGrpSpPr>
-      <p:grpSpPr>
-        <a:xfrm>
-          <a:off x="0" y="0"/>
-          <a:ext cx="0" cy="0"/>
-          <a:chOff x="0" y="0"/>
-          <a:chExt cx="0" cy="0"/>
-        </a:xfrm>
-      </p:grpSpPr>
-      <p:sp>
-        <p:nvSpPr>
-          <p:cNvPr id="2" name="Title 1"/>
-          <p:cNvSpPr>
-            <a:spLocks noGrp="1"/>
-          </p:cNvSpPr>
-          <p:nvPr>
-            <p:ph type="title"/>
-          </p:nvPr>
-        </p:nvSpPr>
-        <p:spPr/>
-        <p:txBody>
-          <a:bodyPr/>
-          <a:lstStyle/>
-          <a:p>
-            <a:pPr lvl="0" indent="0" marL="0">
-              <a:buNone/>
-            </a:pPr>
-            <a:r>
-              <a:rPr/>
-              <a:t>Slide</a:t>
-            </a:r>
-          </a:p>
-        </p:txBody>
-      </p:sp>
-    </p:spTree>
-  </p:cSld>
-</p:sld>
-</file>
-
-<file path=ppt/slides/slide6.xml><?xml version="1.0" encoding="utf-8"?>
 <p:sld xmlns:a="http://schemas.openxmlformats.org/drawingml/2006/main" xmlns:r="http://schemas.openxmlformats.org/officeDocument/2006/relationships" xmlns:p="http://schemas.openxmlformats.org/presentationml/2006/main">
   <p:cSld>
     <p:spTree>

--- a/Assignment 7.1.pptx
+++ b/Assignment 7.1.pptx
@@ -3245,7 +3245,7 @@
             </a:pPr>
             <a:r>
               <a:rPr/>
-              <a:t>Bullets</a:t>
+              <a:t>Data Cleaning Part 1</a:t>
             </a:r>
           </a:p>
         </p:txBody>
@@ -3827,7 +3827,7 @@
 108                  ..                 ..                  ..
 109                &lt;NA&gt;               &lt;NA&gt;                &lt;NA&gt;
 110                &lt;NA&gt;               &lt;NA&gt;                &lt;NA&gt;
-          1968.[YR1968]       1969.[YR1969]        1970.[YR1970]
+                   1968                1969                 1970
 1    34.923628430805195 -7.8834765427466635  -7.0779787809132415
 2    6.7910000000000004               6.806   6.8390000000000004
 3                    ..                  ..                   ..
@@ -3938,7 +3938,7 @@
 108                  ..                  ..                   ..
 109                &lt;NA&gt;                &lt;NA&gt;                 &lt;NA&gt;
 110                &lt;NA&gt;                &lt;NA&gt;                 &lt;NA&gt;
-          1971.[YR1971]       1972.[YR1972]      1973.[YR1973]
+                   1971                1972               1973
 1   -24.084743987338769  -55.64297143675298 96.480849357515183
 2    6.8310000000000004  6.8159999999999998                6.8
 3                    ..                  ..                 ..
@@ -4049,7 +4049,7 @@
 108                  ..                  ..                 ..
 109                &lt;NA&gt;                &lt;NA&gt;               &lt;NA&gt;
 110                &lt;NA&gt;                &lt;NA&gt;               &lt;NA&gt;
-           1974.[YR1974]       1975.[YR1975]       1976.[YR1976]
+                    1974                1975                1976
 1       147.331646032913 -22.088928773518603  18.251090174993038
 2     6.7779999999999996  6.7279999999999998                6.66
 3    0.10000000149011599                  ..                  ..
@@ -4160,7 +4160,7 @@
 108                   ..                  ..                  ..
 109                 &lt;NA&gt;                &lt;NA&gt;                &lt;NA&gt;
 110                 &lt;NA&gt;                &lt;NA&gt;                &lt;NA&gt;
-          1977.[YR1977]       1978.[YR1978]        1979.[YR1979]
+                   1977                1978                 1979
 1     26.22433566860083  25.810653794010889   11.378518993664017
 2    6.5830000000000002  6.5090000000000003   6.4210000000000003
 3                    ..                  ..                   ..
@@ -4271,7 +4271,7 @@
 108                  ..                  ..                   ..
 109                &lt;NA&gt;                &lt;NA&gt;                 &lt;NA&gt;
 110                &lt;NA&gt;                &lt;NA&gt;                 &lt;NA&gt;
-           1980.[YR1980]       1981.[YR1981]          1982.[YR1982]
+                    1980                1981                   1982
 1     17.447236326136007  22.856336056592696     8.5900927692281073
 2     6.3259999999999996  6.2370000000000001     6.1180000000000003
 3                     ..   0.259999990463257                     ..
@@ -4382,7 +4382,7 @@
 108                   ..                  ..                     ..
 109                 &lt;NA&gt;                &lt;NA&gt;                   &lt;NA&gt;
 110                 &lt;NA&gt;                &lt;NA&gt;                   &lt;NA&gt;
-           1983.[YR1983]          1984.[YR1984]       1985.[YR1985]
+                    1983                   1984                1985
 1       4.51215854906701     9.9560357303426912  5.9237765983185966
 2     5.9059999999999997     5.7320000000000002  5.5389999999999997
 3                     ..                     ..                  ..
@@ -4493,7 +4493,7 @@
 108                   ..                     ..                  ..
 109                 &lt;NA&gt;                   &lt;NA&gt;                &lt;NA&gt;
 110                 &lt;NA&gt;                   &lt;NA&gt;                &lt;NA&gt;
-          1986.[YR1986]        1987.[YR1987]       1988.[YR1988]
+                   1986                 1987                1988
 1    5.6137899723900659   10.290120028019885   1.531963669466478
 2    5.3019999999999996   5.0750000000000002  4.8490000000000002
 3                    ..                   ..                  ..
@@ -4604,7 +4604,7 @@
 108                  ..                   ..                  ..
 109                &lt;NA&gt;                 &lt;NA&gt;                &lt;NA&gt;
 110                &lt;NA&gt;                 &lt;NA&gt;                &lt;NA&gt;
-            1989.[YR1989]       1990.[YR1990]       1991.[YR1991]
+                     1989                1990                1991
 1         4.9256150530328  5.5154095752352248  2.4592025910785935
 2      4.6950000000000003  4.5060000000000002  4.2610000000000001
 3                      ..                  ..                  ..
@@ -4715,7 +4715,7 @@
 108                    ..                  ..                  ..
 109                  &lt;NA&gt;                &lt;NA&gt;                &lt;NA&gt;
 110                  &lt;NA&gt;                &lt;NA&gt;                &lt;NA&gt;
-           1992.[YR1992]       1993.[YR1993]       1994.[YR1994]
+                    1992                1993                1994
 1      4.007492561476738  11.164002602016424  9.2375434828786638
 2     4.0270000000000001  3.8319999999999999  3.7370000000000001
 3                     ..                  ..                  ..
@@ -4826,7 +4826,7 @@
 108   3.3800001144409202                  ..                  ..
 109                 &lt;NA&gt;                &lt;NA&gt;                &lt;NA&gt;
 110                 &lt;NA&gt;                &lt;NA&gt;                &lt;NA&gt;
-          1995.[YR1995]        1996.[YR1996]        1997.[YR1997]
+                   1995                 1996                 1997
 1    9.6081626573366634   11.951675808994693   6.4594454025226753
 2    3.5880000000000001   3.5049999999999999   3.5019999999999998
 3                    ..                   ..                   ..
@@ -4937,7 +4937,7 @@
 108                  ..                   ..                   ..
 109                &lt;NA&gt;                 &lt;NA&gt;                 &lt;NA&gt;
 110                &lt;NA&gt;                 &lt;NA&gt;                 &lt;NA&gt;
-          1998.[YR1998]       1999.[YR1999]       2000.[YR2000]
+                   1998                1999                2000
 1    9.1131635845983539  8.5866015912858842  7.1176903661358608
 2                 3.427  3.3570000000000002  3.2789999999999999
 3                    ..                  ..                  ..
@@ -5048,7 +5048,7 @@
 108                  ..                  ..                  ..
 109                &lt;NA&gt;                &lt;NA&gt;                &lt;NA&gt;
 110                &lt;NA&gt;                &lt;NA&gt;                &lt;NA&gt;
-          2001.[YR2001]       2002.[YR2002]        2003.[YR2003]
+                   2001                2002                 2003
 1    7.9347218060633367  7.4201127718929882   7.6573539988475261
 2    3.2029999999999998  3.1259999999999999   3.0289999999999999
 3    3.4900000095367401                  ..                   ..
@@ -5159,7 +5159,7 @@
 108                  ..  5.7399997711181596                   ..
 109                &lt;NA&gt;                &lt;NA&gt;                 &lt;NA&gt;
 110                &lt;NA&gt;                &lt;NA&gt;                 &lt;NA&gt;
-         2004.[YR2004]          2005.[YR2005]          2006.[YR2006]
+                  2004                   2005                   2016
 1   8.2085798365067575      9.763639895665051     9.8879533759372578
 2                 2.94     2.8460000000000001     2.7549999999999999
 3                   ..                     ..                     ..
@@ -5270,7 +5270,7 @@
 108                 ..                     ..                     ..
 109               &lt;NA&gt;                   &lt;NA&gt;                   &lt;NA&gt;
 110               &lt;NA&gt;                   &lt;NA&gt;                   &lt;NA&gt;
-          2007.[YR2007]         2008.[YR2008]        2009.[YR2009]
+                   2007                  2008                 2009
 1    7.1468674755469834    9.8151059251689645   7.3881446491123199
 2    2.6659999999999999                 2.577                2.484
 3                    ..                    ..                   ..
@@ -5381,7 +5381,7 @@
 108                  ..                    ..                   ..
 109                &lt;NA&gt;                  &lt;NA&gt;                 &lt;NA&gt;
 110                &lt;NA&gt;                  &lt;NA&gt;                 &lt;NA&gt;
-          2010.[YR2010]         2011.[YR2011]        2012.[YR2012]
+                   2010                  2011                 2012
 1    8.5646218893021313    9.5609471282075447   10.567729551718301
 2                  2.38    2.3090000000000002   2.2629999999999999
 3                    ..    6.1799998283386204   6.4499998092651403
@@ -5492,7 +5492,7 @@
 108                  ..                    ..                   ..
 109                &lt;NA&gt;                  &lt;NA&gt;                 &lt;NA&gt;
 110                &lt;NA&gt;                  &lt;NA&gt;                 &lt;NA&gt;
-          2013.[YR2013]       2014.[YR2014]       2015.[YR2015]
+                   2013                2014                2015
 1    5.3646417905794266  9.8550513280373195  7.1188007331672196
 2    2.2469999999999999  2.2280000000000002  2.2269999999999999
 3    5.8499999046325701  7.4000000953674299  9.8999996185302699
@@ -5603,7 +5603,7 @@
 108                  ..                  ..                  ..
 109                &lt;NA&gt;                &lt;NA&gt;                &lt;NA&gt;
 110                &lt;NA&gt;                &lt;NA&gt;                &lt;NA&gt;
-            2016.[YR2016]         2017.[YR2017]        2018.[YR2018]
+            2016.[YR2016]                  2017                 2018
 1      8.9093721506821879     8.359573659353785   12.132901224113439
 2      2.2269999999999999    2.2050000000000001   2.1930000000000001
 3        10.0299997329712    10.680000305175801      11.420000076294
@@ -5714,7 +5714,7 @@
 108                    ..                    ..                   ..
 109                  &lt;NA&gt;                  &lt;NA&gt;                 &lt;NA&gt;
 110                  &lt;NA&gt;                  &lt;NA&gt;                 &lt;NA&gt;
-            2019.[YR2019]       2020.[YR2020]
+                     2019                2020
 1      6.8802802368661276   3.945871701546082
 2      2.1800000000000002  2.1749999999999998
 3        11.9799995422363                  ..
@@ -5871,7 +5871,7 @@
             </a:pPr>
             <a:r>
               <a:rPr/>
-              <a:t>Slide</a:t>
+              <a:t>Data Cleaning Part 2</a:t>
             </a:r>
           </a:p>
         </p:txBody>
